--- a/kubernetes/11_1_accessControll_and_resourceConsumption.pptx
+++ b/kubernetes/11_1_accessControll_and_resourceConsumption.pptx
@@ -5,10 +5,10 @@
     <p:sldMasterId id="2147483733" r:id="rId1"/>
   </p:sldMasterIdLst>
   <p:notesMasterIdLst>
-    <p:notesMasterId r:id="rId20"/>
+    <p:notesMasterId r:id="rId22"/>
   </p:notesMasterIdLst>
   <p:handoutMasterIdLst>
-    <p:handoutMasterId r:id="rId21"/>
+    <p:handoutMasterId r:id="rId23"/>
   </p:handoutMasterIdLst>
   <p:sldIdLst>
     <p:sldId id="962" r:id="rId2"/>
@@ -26,9 +26,11 @@
     <p:sldId id="963" r:id="rId14"/>
     <p:sldId id="956" r:id="rId15"/>
     <p:sldId id="957" r:id="rId16"/>
-    <p:sldId id="929" r:id="rId17"/>
-    <p:sldId id="930" r:id="rId18"/>
-    <p:sldId id="265" r:id="rId19"/>
+    <p:sldId id="438" r:id="rId17"/>
+    <p:sldId id="439" r:id="rId18"/>
+    <p:sldId id="929" r:id="rId19"/>
+    <p:sldId id="930" r:id="rId20"/>
+    <p:sldId id="265" r:id="rId21"/>
   </p:sldIdLst>
   <p:sldSz cx="12195175" cy="6858000"/>
   <p:notesSz cx="6858000" cy="9144000"/>
@@ -1349,6 +1351,293 @@
           <a:bodyPr/>
           <a:lstStyle/>
           <a:p>
+            <a:r>
+              <a:rPr lang="en-US" dirty="0"/>
+              <a:t>Requests and limits are used to place pods on nodes. Requests do not exceed 100%, but in terms of limits – a node can be overcommitted heavily.</a:t>
+            </a:r>
+          </a:p>
+          <a:p>
+            <a:endParaRPr lang="en-US" dirty="0"/>
+          </a:p>
+          <a:p>
+            <a:r>
+              <a:rPr lang="en-US" dirty="0"/>
+              <a:t>Check `</a:t>
+            </a:r>
+            <a:r>
+              <a:rPr lang="en-US" dirty="0" err="1"/>
+              <a:t>kubectl</a:t>
+            </a:r>
+            <a:r>
+              <a:rPr lang="en-US" dirty="0"/>
+              <a:t> describe node &lt;node-name` and show the resource section e.g.</a:t>
+            </a:r>
+          </a:p>
+          <a:p>
+            <a:endParaRPr lang="en-US" dirty="0"/>
+          </a:p>
+          <a:p>
+            <a:r>
+              <a:rPr lang="en-US" dirty="0"/>
+              <a:t>Allocated resources:</a:t>
+            </a:r>
+          </a:p>
+          <a:p>
+            <a:r>
+              <a:rPr lang="en-US" dirty="0"/>
+              <a:t>  (Total limits may be over 100 percent, i.e., overcommitted.)</a:t>
+            </a:r>
+          </a:p>
+          <a:p>
+            <a:r>
+              <a:rPr lang="en-US" dirty="0"/>
+              <a:t>  Resource           Requests      Limits</a:t>
+            </a:r>
+          </a:p>
+          <a:p>
+            <a:r>
+              <a:rPr lang="en-US" dirty="0"/>
+              <a:t>  --------           --------      ------</a:t>
+            </a:r>
+          </a:p>
+          <a:p>
+            <a:r>
+              <a:rPr lang="en-US" dirty="0"/>
+              <a:t>  </a:t>
+            </a:r>
+            <a:r>
+              <a:rPr lang="en-US" dirty="0" err="1"/>
+              <a:t>cpu</a:t>
+            </a:r>
+            <a:r>
+              <a:rPr lang="en-US" dirty="0"/>
+              <a:t>                1915m (99%)   15435m (803%)</a:t>
+            </a:r>
+          </a:p>
+          <a:p>
+            <a:r>
+              <a:rPr lang="en-US" dirty="0"/>
+              <a:t>  memory             2396Mi (39%)  9653Mi (159%)</a:t>
+            </a:r>
+          </a:p>
+          <a:p>
+            <a:r>
+              <a:rPr lang="en-US" dirty="0"/>
+              <a:t>  ephemeral-storage  0 (0%)        0 (0%)</a:t>
+            </a:r>
+          </a:p>
+          <a:p>
+            <a:r>
+              <a:rPr lang="en-US" dirty="0"/>
+              <a:t>  hugepages-1Gi      0 (0%)        0 (0%)</a:t>
+            </a:r>
+          </a:p>
+          <a:p>
+            <a:r>
+              <a:rPr lang="en-US" dirty="0"/>
+              <a:t>  hugepages-2Mi      0 (0%)        0 (0%)</a:t>
+            </a:r>
+          </a:p>
+        </p:txBody>
+      </p:sp>
+      <p:sp>
+        <p:nvSpPr>
+          <p:cNvPr id="4" name="Slide Number Placeholder 3"/>
+          <p:cNvSpPr>
+            <a:spLocks noGrp="1"/>
+          </p:cNvSpPr>
+          <p:nvPr>
+            <p:ph type="sldNum" sz="quarter" idx="5"/>
+          </p:nvPr>
+        </p:nvSpPr>
+        <p:spPr/>
+        <p:txBody>
+          <a:bodyPr/>
+          <a:lstStyle/>
+          <a:p>
+            <a:fld id="{7D8C2C35-2B8A-446E-BEC0-FD36716C29AC}" type="slidenum">
+              <a:rPr lang="de-DE" smtClean="0"/>
+              <a:pPr/>
+              <a:t>16</a:t>
+            </a:fld>
+            <a:endParaRPr lang="de-DE" dirty="0"/>
+          </a:p>
+        </p:txBody>
+      </p:sp>
+    </p:spTree>
+    <p:extLst>
+      <p:ext uri="{BB962C8B-B14F-4D97-AF65-F5344CB8AC3E}">
+        <p14:creationId xmlns:p14="http://schemas.microsoft.com/office/powerpoint/2010/main" val="3710754225"/>
+      </p:ext>
+    </p:extLst>
+  </p:cSld>
+  <p:clrMapOvr>
+    <a:masterClrMapping/>
+  </p:clrMapOvr>
+</p:notes>
+</file>
+
+<file path=ppt/notesSlides/notesSlide15.xml><?xml version="1.0" encoding="utf-8"?>
+<p:notes xmlns:a="http://schemas.openxmlformats.org/drawingml/2006/main" xmlns:r="http://schemas.openxmlformats.org/officeDocument/2006/relationships" xmlns:p="http://schemas.openxmlformats.org/presentationml/2006/main">
+  <p:cSld>
+    <p:spTree>
+      <p:nvGrpSpPr>
+        <p:cNvPr id="1" name=""/>
+        <p:cNvGrpSpPr/>
+        <p:nvPr/>
+      </p:nvGrpSpPr>
+      <p:grpSpPr>
+        <a:xfrm>
+          <a:off x="0" y="0"/>
+          <a:ext cx="0" cy="0"/>
+          <a:chOff x="0" y="0"/>
+          <a:chExt cx="0" cy="0"/>
+        </a:xfrm>
+      </p:grpSpPr>
+      <p:sp>
+        <p:nvSpPr>
+          <p:cNvPr id="2" name="Slide Image Placeholder 1"/>
+          <p:cNvSpPr>
+            <a:spLocks noGrp="1" noRot="1" noChangeAspect="1"/>
+          </p:cNvSpPr>
+          <p:nvPr>
+            <p:ph type="sldImg"/>
+          </p:nvPr>
+        </p:nvSpPr>
+        <p:spPr/>
+      </p:sp>
+      <p:sp>
+        <p:nvSpPr>
+          <p:cNvPr id="3" name="Notes Placeholder 2"/>
+          <p:cNvSpPr>
+            <a:spLocks noGrp="1"/>
+          </p:cNvSpPr>
+          <p:nvPr>
+            <p:ph type="body" idx="1"/>
+          </p:nvPr>
+        </p:nvSpPr>
+        <p:spPr/>
+        <p:txBody>
+          <a:bodyPr/>
+          <a:lstStyle/>
+          <a:p>
+            <a:r>
+              <a:rPr lang="en-US" dirty="0"/>
+              <a:t>If request = limit, a pod is scheduled in class guaranteed</a:t>
+            </a:r>
+          </a:p>
+          <a:p>
+            <a:r>
+              <a:rPr lang="en-US" dirty="0"/>
+              <a:t>If there is at least a request or limit, a pod is scheduled in class burstable</a:t>
+            </a:r>
+          </a:p>
+          <a:p>
+            <a:r>
+              <a:rPr lang="en-US" dirty="0"/>
+              <a:t>If nothing is specified, </a:t>
+            </a:r>
+            <a:r>
+              <a:rPr lang="en-US" dirty="0" err="1"/>
+              <a:t>qos</a:t>
+            </a:r>
+            <a:r>
+              <a:rPr lang="en-US" dirty="0"/>
+              <a:t> class is best effort</a:t>
+            </a:r>
+          </a:p>
+          <a:p>
+            <a:endParaRPr lang="en-US" dirty="0"/>
+          </a:p>
+          <a:p>
+            <a:r>
+              <a:rPr lang="en-US" dirty="0"/>
+              <a:t>Classes are used for scheduling and eviction decisions. QoS best effort pods are terminated first.</a:t>
+            </a:r>
+          </a:p>
+        </p:txBody>
+      </p:sp>
+      <p:sp>
+        <p:nvSpPr>
+          <p:cNvPr id="4" name="Slide Number Placeholder 3"/>
+          <p:cNvSpPr>
+            <a:spLocks noGrp="1"/>
+          </p:cNvSpPr>
+          <p:nvPr>
+            <p:ph type="sldNum" sz="quarter" idx="5"/>
+          </p:nvPr>
+        </p:nvSpPr>
+        <p:spPr/>
+        <p:txBody>
+          <a:bodyPr/>
+          <a:lstStyle/>
+          <a:p>
+            <a:fld id="{7D8C2C35-2B8A-446E-BEC0-FD36716C29AC}" type="slidenum">
+              <a:rPr lang="de-DE" smtClean="0"/>
+              <a:pPr/>
+              <a:t>17</a:t>
+            </a:fld>
+            <a:endParaRPr lang="de-DE" dirty="0"/>
+          </a:p>
+        </p:txBody>
+      </p:sp>
+    </p:spTree>
+    <p:extLst>
+      <p:ext uri="{BB962C8B-B14F-4D97-AF65-F5344CB8AC3E}">
+        <p14:creationId xmlns:p14="http://schemas.microsoft.com/office/powerpoint/2010/main" val="3055934857"/>
+      </p:ext>
+    </p:extLst>
+  </p:cSld>
+  <p:clrMapOvr>
+    <a:masterClrMapping/>
+  </p:clrMapOvr>
+</p:notes>
+</file>
+
+<file path=ppt/notesSlides/notesSlide16.xml><?xml version="1.0" encoding="utf-8"?>
+<p:notes xmlns:a="http://schemas.openxmlformats.org/drawingml/2006/main" xmlns:r="http://schemas.openxmlformats.org/officeDocument/2006/relationships" xmlns:p="http://schemas.openxmlformats.org/presentationml/2006/main">
+  <p:cSld>
+    <p:spTree>
+      <p:nvGrpSpPr>
+        <p:cNvPr id="1" name=""/>
+        <p:cNvGrpSpPr/>
+        <p:nvPr/>
+      </p:nvGrpSpPr>
+      <p:grpSpPr>
+        <a:xfrm>
+          <a:off x="0" y="0"/>
+          <a:ext cx="0" cy="0"/>
+          <a:chOff x="0" y="0"/>
+          <a:chExt cx="0" cy="0"/>
+        </a:xfrm>
+      </p:grpSpPr>
+      <p:sp>
+        <p:nvSpPr>
+          <p:cNvPr id="2" name="Slide Image Placeholder 1"/>
+          <p:cNvSpPr>
+            <a:spLocks noGrp="1" noRot="1" noChangeAspect="1"/>
+          </p:cNvSpPr>
+          <p:nvPr>
+            <p:ph type="sldImg"/>
+          </p:nvPr>
+        </p:nvSpPr>
+        <p:spPr/>
+      </p:sp>
+      <p:sp>
+        <p:nvSpPr>
+          <p:cNvPr id="3" name="Notes Placeholder 2"/>
+          <p:cNvSpPr>
+            <a:spLocks noGrp="1"/>
+          </p:cNvSpPr>
+          <p:nvPr>
+            <p:ph type="body" idx="1"/>
+          </p:nvPr>
+        </p:nvSpPr>
+        <p:spPr/>
+        <p:txBody>
+          <a:bodyPr/>
+          <a:lstStyle/>
+          <a:p>
             <a:endParaRPr lang="en-US" dirty="0"/>
           </a:p>
         </p:txBody>
@@ -1371,7 +1660,7 @@
             <a:fld id="{7D8C2C35-2B8A-446E-BEC0-FD36716C29AC}" type="slidenum">
               <a:rPr lang="de-DE" smtClean="0"/>
               <a:pPr/>
-              <a:t>17</a:t>
+              <a:t>19</a:t>
             </a:fld>
             <a:endParaRPr lang="de-DE" dirty="0"/>
           </a:p>
@@ -1390,7 +1679,7 @@
 </p:notes>
 </file>
 
-<file path=ppt/notesSlides/notesSlide15.xml><?xml version="1.0" encoding="utf-8"?>
+<file path=ppt/notesSlides/notesSlide17.xml><?xml version="1.0" encoding="utf-8"?>
 <p:notes xmlns:a="http://schemas.openxmlformats.org/drawingml/2006/main" xmlns:r="http://schemas.openxmlformats.org/officeDocument/2006/relationships" xmlns:p="http://schemas.openxmlformats.org/presentationml/2006/main">
   <p:cSld>
     <p:spTree>
@@ -1425,7 +1714,7 @@
             <a:fld id="{7D8C2C35-2B8A-446E-BEC0-FD36716C29AC}" type="slidenum">
               <a:rPr lang="en-US" smtClean="0"/>
               <a:pPr/>
-              <a:t>18</a:t>
+              <a:t>20</a:t>
             </a:fld>
             <a:endParaRPr lang="en-US" dirty="0"/>
           </a:p>
@@ -3688,7 +3977,7 @@
   <p:clrMapOvr>
     <a:masterClrMapping/>
   </p:clrMapOvr>
-  <p:extLst mod="1">
+  <p:extLst>
     <p:ext uri="{DCECCB84-F9BA-43D5-87BE-67443E8EF086}">
       <p15:sldGuideLst xmlns:p15="http://schemas.microsoft.com/office/powerpoint/2012/main"/>
     </p:ext>
@@ -6579,7 +6868,7 @@
   <p:clrMapOvr>
     <a:masterClrMapping/>
   </p:clrMapOvr>
-  <p:extLst mod="1">
+  <p:extLst>
     <p:ext uri="{DCECCB84-F9BA-43D5-87BE-67443E8EF086}">
       <p15:sldGuideLst xmlns:p15="http://schemas.microsoft.com/office/powerpoint/2012/main"/>
     </p:ext>
@@ -6756,7 +7045,7 @@
   <p:clrMapOvr>
     <a:masterClrMapping/>
   </p:clrMapOvr>
-  <p:extLst mod="1">
+  <p:extLst>
     <p:ext uri="{DCECCB84-F9BA-43D5-87BE-67443E8EF086}">
       <p15:sldGuideLst xmlns:p15="http://schemas.microsoft.com/office/powerpoint/2012/main"/>
     </p:ext>
@@ -14553,7 +14842,7 @@
   <p:clrMapOvr>
     <a:masterClrMapping/>
   </p:clrMapOvr>
-  <p:extLst mod="1">
+  <p:extLst>
     <p:ext uri="{DCECCB84-F9BA-43D5-87BE-67443E8EF086}">
       <p15:sldGuideLst xmlns:p15="http://schemas.microsoft.com/office/powerpoint/2012/main"/>
     </p:ext>
@@ -14978,7 +15267,7 @@
   <p:clrMapOvr>
     <a:masterClrMapping/>
   </p:clrMapOvr>
-  <p:extLst mod="1">
+  <p:extLst>
     <p:ext uri="{DCECCB84-F9BA-43D5-87BE-67443E8EF086}">
       <p15:sldGuideLst xmlns:p15="http://schemas.microsoft.com/office/powerpoint/2012/main"/>
     </p:ext>
@@ -16334,7 +16623,7 @@
       </a:lvl9pPr>
     </p:otherStyle>
   </p:txStyles>
-  <p:extLst mod="1">
+  <p:extLst>
     <p:ext uri="{27BBF7A9-308A-43DC-89C8-2F10F3537804}">
       <p15:sldGuideLst xmlns:p15="http://schemas.microsoft.com/office/powerpoint/2012/main"/>
     </p:ext>
@@ -19513,6 +19802,2851 @@
       </p:grpSpPr>
       <p:sp>
         <p:nvSpPr>
+          <p:cNvPr id="2" name="Title 1">
+            <a:extLst>
+              <a:ext uri="{FF2B5EF4-FFF2-40B4-BE49-F238E27FC236}">
+                <a16:creationId xmlns:a16="http://schemas.microsoft.com/office/drawing/2014/main" id="{56E79FE2-0131-4615-82D4-DE718F986D31}"/>
+              </a:ext>
+            </a:extLst>
+          </p:cNvPr>
+          <p:cNvSpPr>
+            <a:spLocks noGrp="1"/>
+          </p:cNvSpPr>
+          <p:nvPr>
+            <p:ph type="title"/>
+          </p:nvPr>
+        </p:nvSpPr>
+        <p:spPr/>
+        <p:txBody>
+          <a:bodyPr/>
+          <a:lstStyle/>
+          <a:p>
+            <a:r>
+              <a:rPr lang="en-US" dirty="0"/>
+              <a:t>Resource requests &amp; limits</a:t>
+            </a:r>
+          </a:p>
+        </p:txBody>
+      </p:sp>
+      <p:pic>
+        <p:nvPicPr>
+          <p:cNvPr id="3" name="Picture 2">
+            <a:extLst>
+              <a:ext uri="{FF2B5EF4-FFF2-40B4-BE49-F238E27FC236}">
+                <a16:creationId xmlns:a16="http://schemas.microsoft.com/office/drawing/2014/main" id="{B03E2829-748E-444A-9657-B2971A8E7670}"/>
+              </a:ext>
+            </a:extLst>
+          </p:cNvPr>
+          <p:cNvPicPr>
+            <a:picLocks noChangeAspect="1"/>
+          </p:cNvPicPr>
+          <p:nvPr/>
+        </p:nvPicPr>
+        <p:blipFill>
+          <a:blip r:embed="rId3"/>
+          <a:stretch>
+            <a:fillRect/>
+          </a:stretch>
+        </p:blipFill>
+        <p:spPr>
+          <a:xfrm>
+            <a:off x="500302" y="2178393"/>
+            <a:ext cx="3894264" cy="3094074"/>
+          </a:xfrm>
+          <a:prstGeom prst="rect">
+            <a:avLst/>
+          </a:prstGeom>
+          <a:ln>
+            <a:solidFill>
+              <a:schemeClr val="tx1"/>
+            </a:solidFill>
+          </a:ln>
+        </p:spPr>
+      </p:pic>
+      <p:sp>
+        <p:nvSpPr>
+          <p:cNvPr id="4" name="Rectangle 3">
+            <a:extLst>
+              <a:ext uri="{FF2B5EF4-FFF2-40B4-BE49-F238E27FC236}">
+                <a16:creationId xmlns:a16="http://schemas.microsoft.com/office/drawing/2014/main" id="{90EC850C-B7C2-4AB1-B2D4-FC53A93CA314}"/>
+              </a:ext>
+            </a:extLst>
+          </p:cNvPr>
+          <p:cNvSpPr/>
+          <p:nvPr/>
+        </p:nvSpPr>
+        <p:spPr>
+          <a:xfrm>
+            <a:off x="500302" y="1569214"/>
+            <a:ext cx="4155305" cy="461665"/>
+          </a:xfrm>
+          <a:prstGeom prst="rect">
+            <a:avLst/>
+          </a:prstGeom>
+        </p:spPr>
+        <p:txBody>
+          <a:bodyPr wrap="none">
+            <a:spAutoFit/>
+          </a:bodyPr>
+          <a:lstStyle/>
+          <a:p>
+            <a:r>
+              <a:rPr lang="de-DE" sz="2400" dirty="0"/>
+              <a:t>.</a:t>
+            </a:r>
+            <a:r>
+              <a:rPr lang="de-DE" sz="2400" dirty="0" err="1"/>
+              <a:t>spec.containers</a:t>
+            </a:r>
+            <a:r>
+              <a:rPr lang="de-DE" sz="2400" dirty="0"/>
+              <a:t>[].</a:t>
+            </a:r>
+            <a:r>
+              <a:rPr lang="de-DE" sz="2400" dirty="0" err="1"/>
+              <a:t>resources</a:t>
+            </a:r>
+            <a:r>
+              <a:rPr lang="de-DE" sz="2400" dirty="0"/>
+              <a:t>*</a:t>
+            </a:r>
+            <a:endParaRPr lang="en-US" sz="2400" dirty="0"/>
+          </a:p>
+        </p:txBody>
+      </p:sp>
+      <p:sp>
+        <p:nvSpPr>
+          <p:cNvPr id="6" name="Rectangle 5">
+            <a:extLst>
+              <a:ext uri="{FF2B5EF4-FFF2-40B4-BE49-F238E27FC236}">
+                <a16:creationId xmlns:a16="http://schemas.microsoft.com/office/drawing/2014/main" id="{DB8FB15C-8570-4538-8540-4A094BFB786D}"/>
+              </a:ext>
+            </a:extLst>
+          </p:cNvPr>
+          <p:cNvSpPr/>
+          <p:nvPr/>
+        </p:nvSpPr>
+        <p:spPr bwMode="gray">
+          <a:xfrm>
+            <a:off x="5431444" y="2321047"/>
+            <a:ext cx="2962939" cy="2808766"/>
+          </a:xfrm>
+          <a:prstGeom prst="rect">
+            <a:avLst/>
+          </a:prstGeom>
+          <a:noFill/>
+          <a:ln w="25400" algn="ctr">
+            <a:solidFill>
+              <a:schemeClr val="tx1"/>
+            </a:solidFill>
+            <a:miter lim="800000"/>
+            <a:headEnd/>
+            <a:tailEnd/>
+          </a:ln>
+        </p:spPr>
+        <p:txBody>
+          <a:bodyPr lIns="90000" tIns="72000" rIns="90000" bIns="72000" rtlCol="0" anchor="b"/>
+          <a:lstStyle/>
+          <a:p>
+            <a:pPr marR="0" algn="ctr" defTabSz="914400" eaLnBrk="1" fontAlgn="base" latinLnBrk="0" hangingPunct="1">
+              <a:lnSpc>
+                <a:spcPct val="100000"/>
+              </a:lnSpc>
+              <a:spcBef>
+                <a:spcPct val="50000"/>
+              </a:spcBef>
+              <a:spcAft>
+                <a:spcPct val="0"/>
+              </a:spcAft>
+              <a:buClr>
+                <a:srgbClr val="F0AB00"/>
+              </a:buClr>
+              <a:buSzPct val="80000"/>
+              <a:tabLst/>
+            </a:pPr>
+            <a:endParaRPr kumimoji="0" lang="en-US" sz="1800" b="1" i="0" u="none" strike="noStrike" kern="0" cap="none" spc="0" normalizeH="0" baseline="0" noProof="0" dirty="0">
+              <a:ln>
+                <a:noFill/>
+              </a:ln>
+              <a:effectLst/>
+              <a:uLnTx/>
+              <a:uFillTx/>
+              <a:ea typeface="Arial Unicode MS" pitchFamily="34" charset="-128"/>
+              <a:cs typeface="Arial Unicode MS" pitchFamily="34" charset="-128"/>
+            </a:endParaRPr>
+          </a:p>
+        </p:txBody>
+      </p:sp>
+      <p:sp>
+        <p:nvSpPr>
+          <p:cNvPr id="7" name="Rectangle 6">
+            <a:extLst>
+              <a:ext uri="{FF2B5EF4-FFF2-40B4-BE49-F238E27FC236}">
+                <a16:creationId xmlns:a16="http://schemas.microsoft.com/office/drawing/2014/main" id="{B7D8EB15-56FB-41F1-B144-D38057285B86}"/>
+              </a:ext>
+            </a:extLst>
+          </p:cNvPr>
+          <p:cNvSpPr/>
+          <p:nvPr/>
+        </p:nvSpPr>
+        <p:spPr bwMode="gray">
+          <a:xfrm>
+            <a:off x="5431443" y="4265032"/>
+            <a:ext cx="1481470" cy="864781"/>
+          </a:xfrm>
+          <a:prstGeom prst="rect">
+            <a:avLst/>
+          </a:prstGeom>
+          <a:ln>
+            <a:headEnd/>
+            <a:tailEnd/>
+          </a:ln>
+        </p:spPr>
+        <p:style>
+          <a:lnRef idx="2">
+            <a:schemeClr val="accent2"/>
+          </a:lnRef>
+          <a:fillRef idx="1">
+            <a:schemeClr val="lt1"/>
+          </a:fillRef>
+          <a:effectRef idx="0">
+            <a:schemeClr val="accent2"/>
+          </a:effectRef>
+          <a:fontRef idx="minor">
+            <a:schemeClr val="dk1"/>
+          </a:fontRef>
+        </p:style>
+        <p:txBody>
+          <a:bodyPr lIns="90000" tIns="72000" rIns="90000" bIns="72000" rtlCol="0" anchor="ctr"/>
+          <a:lstStyle/>
+          <a:p>
+            <a:pPr marR="0" algn="ctr" defTabSz="914400" eaLnBrk="1" fontAlgn="base" latinLnBrk="0" hangingPunct="1">
+              <a:lnSpc>
+                <a:spcPct val="100000"/>
+              </a:lnSpc>
+              <a:spcBef>
+                <a:spcPct val="50000"/>
+              </a:spcBef>
+              <a:spcAft>
+                <a:spcPct val="0"/>
+              </a:spcAft>
+              <a:buClr>
+                <a:srgbClr val="F0AB00"/>
+              </a:buClr>
+              <a:buSzPct val="80000"/>
+              <a:tabLst/>
+            </a:pPr>
+            <a:r>
+              <a:rPr kumimoji="0" lang="en-US" sz="1800" b="0" i="0" u="none" strike="noStrike" kern="0" cap="none" spc="0" normalizeH="0" baseline="0" noProof="0" dirty="0">
+                <a:ln>
+                  <a:noFill/>
+                </a:ln>
+                <a:effectLst/>
+                <a:uLnTx/>
+                <a:uFillTx/>
+                <a:ea typeface="Arial Unicode MS" pitchFamily="34" charset="-128"/>
+                <a:cs typeface="Arial Unicode MS" pitchFamily="34" charset="-128"/>
+              </a:rPr>
+              <a:t>CPU request</a:t>
+            </a:r>
+          </a:p>
+        </p:txBody>
+      </p:sp>
+      <p:sp>
+        <p:nvSpPr>
+          <p:cNvPr id="9" name="Rectangle 8">
+            <a:extLst>
+              <a:ext uri="{FF2B5EF4-FFF2-40B4-BE49-F238E27FC236}">
+                <a16:creationId xmlns:a16="http://schemas.microsoft.com/office/drawing/2014/main" id="{C84F564C-1ECF-4AF4-817B-8BD31455925E}"/>
+              </a:ext>
+            </a:extLst>
+          </p:cNvPr>
+          <p:cNvSpPr/>
+          <p:nvPr/>
+        </p:nvSpPr>
+        <p:spPr bwMode="gray">
+          <a:xfrm>
+            <a:off x="6912913" y="3378987"/>
+            <a:ext cx="1481470" cy="864781"/>
+          </a:xfrm>
+          <a:prstGeom prst="rect">
+            <a:avLst/>
+          </a:prstGeom>
+          <a:ln>
+            <a:headEnd/>
+            <a:tailEnd/>
+          </a:ln>
+        </p:spPr>
+        <p:style>
+          <a:lnRef idx="2">
+            <a:schemeClr val="accent2"/>
+          </a:lnRef>
+          <a:fillRef idx="1">
+            <a:schemeClr val="lt1"/>
+          </a:fillRef>
+          <a:effectRef idx="0">
+            <a:schemeClr val="accent2"/>
+          </a:effectRef>
+          <a:fontRef idx="minor">
+            <a:schemeClr val="dk1"/>
+          </a:fontRef>
+        </p:style>
+        <p:txBody>
+          <a:bodyPr lIns="90000" tIns="72000" rIns="90000" bIns="72000" rtlCol="0" anchor="ctr"/>
+          <a:lstStyle/>
+          <a:p>
+            <a:pPr marR="0" algn="ctr" defTabSz="914400" eaLnBrk="1" fontAlgn="base" latinLnBrk="0" hangingPunct="1">
+              <a:lnSpc>
+                <a:spcPct val="100000"/>
+              </a:lnSpc>
+              <a:spcBef>
+                <a:spcPct val="50000"/>
+              </a:spcBef>
+              <a:spcAft>
+                <a:spcPct val="0"/>
+              </a:spcAft>
+              <a:buClr>
+                <a:srgbClr val="F0AB00"/>
+              </a:buClr>
+              <a:buSzPct val="80000"/>
+              <a:tabLst/>
+            </a:pPr>
+            <a:r>
+              <a:rPr kumimoji="0" lang="en-US" sz="1800" b="0" i="0" u="none" strike="noStrike" kern="0" cap="none" spc="0" normalizeH="0" baseline="0" noProof="0" dirty="0">
+                <a:ln>
+                  <a:noFill/>
+                </a:ln>
+                <a:effectLst/>
+                <a:uLnTx/>
+                <a:uFillTx/>
+                <a:ea typeface="Arial Unicode MS" pitchFamily="34" charset="-128"/>
+                <a:cs typeface="Arial Unicode MS" pitchFamily="34" charset="-128"/>
+              </a:rPr>
+              <a:t>CPU request</a:t>
+            </a:r>
+          </a:p>
+        </p:txBody>
+      </p:sp>
+      <p:sp>
+        <p:nvSpPr>
+          <p:cNvPr id="10" name="Rectangle 9">
+            <a:extLst>
+              <a:ext uri="{FF2B5EF4-FFF2-40B4-BE49-F238E27FC236}">
+                <a16:creationId xmlns:a16="http://schemas.microsoft.com/office/drawing/2014/main" id="{B1FB8896-9008-4F5F-83E7-DF0250ED79E6}"/>
+              </a:ext>
+            </a:extLst>
+          </p:cNvPr>
+          <p:cNvSpPr/>
+          <p:nvPr/>
+        </p:nvSpPr>
+        <p:spPr>
+          <a:xfrm>
+            <a:off x="6435859" y="5301708"/>
+            <a:ext cx="1689886" cy="461665"/>
+          </a:xfrm>
+          <a:prstGeom prst="rect">
+            <a:avLst/>
+          </a:prstGeom>
+        </p:spPr>
+        <p:txBody>
+          <a:bodyPr wrap="none">
+            <a:spAutoFit/>
+          </a:bodyPr>
+          <a:lstStyle/>
+          <a:p>
+            <a:r>
+              <a:rPr lang="en-US" sz="2400" b="1" kern="0" dirty="0">
+                <a:ea typeface="Arial Unicode MS" pitchFamily="34" charset="-128"/>
+                <a:cs typeface="Arial Unicode MS" pitchFamily="34" charset="-128"/>
+              </a:rPr>
+              <a:t>Node CPU</a:t>
+            </a:r>
+            <a:endParaRPr lang="en-US" dirty="0"/>
+          </a:p>
+        </p:txBody>
+      </p:sp>
+      <p:sp>
+        <p:nvSpPr>
+          <p:cNvPr id="11" name="Rectangle 10">
+            <a:extLst>
+              <a:ext uri="{FF2B5EF4-FFF2-40B4-BE49-F238E27FC236}">
+                <a16:creationId xmlns:a16="http://schemas.microsoft.com/office/drawing/2014/main" id="{161D1BC4-A181-4DF0-8187-B2F2D67DB72A}"/>
+              </a:ext>
+            </a:extLst>
+          </p:cNvPr>
+          <p:cNvSpPr/>
+          <p:nvPr/>
+        </p:nvSpPr>
+        <p:spPr bwMode="gray">
+          <a:xfrm>
+            <a:off x="5431443" y="2342313"/>
+            <a:ext cx="1481470" cy="1922721"/>
+          </a:xfrm>
+          <a:prstGeom prst="rect">
+            <a:avLst/>
+          </a:prstGeom>
+          <a:ln>
+            <a:headEnd/>
+            <a:tailEnd/>
+          </a:ln>
+        </p:spPr>
+        <p:style>
+          <a:lnRef idx="2">
+            <a:schemeClr val="accent2"/>
+          </a:lnRef>
+          <a:fillRef idx="1">
+            <a:schemeClr val="lt1"/>
+          </a:fillRef>
+          <a:effectRef idx="0">
+            <a:schemeClr val="accent2"/>
+          </a:effectRef>
+          <a:fontRef idx="minor">
+            <a:schemeClr val="dk1"/>
+          </a:fontRef>
+        </p:style>
+        <p:txBody>
+          <a:bodyPr lIns="90000" tIns="72000" rIns="90000" bIns="72000" rtlCol="0" anchor="ctr"/>
+          <a:lstStyle/>
+          <a:p>
+            <a:pPr marR="0" algn="ctr" defTabSz="914400" eaLnBrk="1" fontAlgn="base" latinLnBrk="0" hangingPunct="1">
+              <a:lnSpc>
+                <a:spcPct val="100000"/>
+              </a:lnSpc>
+              <a:spcBef>
+                <a:spcPct val="50000"/>
+              </a:spcBef>
+              <a:spcAft>
+                <a:spcPct val="0"/>
+              </a:spcAft>
+              <a:buClr>
+                <a:srgbClr val="F0AB00"/>
+              </a:buClr>
+              <a:buSzPct val="80000"/>
+              <a:tabLst/>
+            </a:pPr>
+            <a:r>
+              <a:rPr kumimoji="0" lang="en-US" sz="1800" b="0" i="0" u="none" strike="noStrike" kern="0" cap="none" spc="0" normalizeH="0" baseline="0" noProof="0" dirty="0">
+                <a:ln>
+                  <a:noFill/>
+                </a:ln>
+                <a:effectLst/>
+                <a:uLnTx/>
+                <a:uFillTx/>
+                <a:ea typeface="Arial Unicode MS" pitchFamily="34" charset="-128"/>
+                <a:cs typeface="Arial Unicode MS" pitchFamily="34" charset="-128"/>
+              </a:rPr>
+              <a:t>CPU limit</a:t>
+            </a:r>
+          </a:p>
+        </p:txBody>
+      </p:sp>
+      <p:sp>
+        <p:nvSpPr>
+          <p:cNvPr id="12" name="Rectangle 11">
+            <a:extLst>
+              <a:ext uri="{FF2B5EF4-FFF2-40B4-BE49-F238E27FC236}">
+                <a16:creationId xmlns:a16="http://schemas.microsoft.com/office/drawing/2014/main" id="{4637C3AA-18E9-4853-A48C-F67E0623A57A}"/>
+              </a:ext>
+            </a:extLst>
+          </p:cNvPr>
+          <p:cNvSpPr/>
+          <p:nvPr/>
+        </p:nvSpPr>
+        <p:spPr bwMode="gray">
+          <a:xfrm>
+            <a:off x="6912913" y="1456266"/>
+            <a:ext cx="1481470" cy="1922721"/>
+          </a:xfrm>
+          <a:prstGeom prst="rect">
+            <a:avLst/>
+          </a:prstGeom>
+          <a:ln>
+            <a:headEnd/>
+            <a:tailEnd/>
+          </a:ln>
+        </p:spPr>
+        <p:style>
+          <a:lnRef idx="2">
+            <a:schemeClr val="accent2"/>
+          </a:lnRef>
+          <a:fillRef idx="1">
+            <a:schemeClr val="lt1"/>
+          </a:fillRef>
+          <a:effectRef idx="0">
+            <a:schemeClr val="accent2"/>
+          </a:effectRef>
+          <a:fontRef idx="minor">
+            <a:schemeClr val="dk1"/>
+          </a:fontRef>
+        </p:style>
+        <p:txBody>
+          <a:bodyPr lIns="90000" tIns="72000" rIns="90000" bIns="72000" rtlCol="0" anchor="ctr"/>
+          <a:lstStyle/>
+          <a:p>
+            <a:pPr marR="0" algn="ctr" defTabSz="914400" eaLnBrk="1" fontAlgn="base" latinLnBrk="0" hangingPunct="1">
+              <a:lnSpc>
+                <a:spcPct val="100000"/>
+              </a:lnSpc>
+              <a:spcBef>
+                <a:spcPct val="50000"/>
+              </a:spcBef>
+              <a:spcAft>
+                <a:spcPct val="0"/>
+              </a:spcAft>
+              <a:buClr>
+                <a:srgbClr val="F0AB00"/>
+              </a:buClr>
+              <a:buSzPct val="80000"/>
+              <a:tabLst/>
+            </a:pPr>
+            <a:r>
+              <a:rPr kumimoji="0" lang="en-US" sz="1800" b="0" i="0" u="none" strike="noStrike" kern="0" cap="none" spc="0" normalizeH="0" baseline="0" noProof="0" dirty="0">
+                <a:ln>
+                  <a:noFill/>
+                </a:ln>
+                <a:effectLst/>
+                <a:uLnTx/>
+                <a:uFillTx/>
+                <a:ea typeface="Arial Unicode MS" pitchFamily="34" charset="-128"/>
+                <a:cs typeface="Arial Unicode MS" pitchFamily="34" charset="-128"/>
+              </a:rPr>
+              <a:t>CPU limit</a:t>
+            </a:r>
+          </a:p>
+        </p:txBody>
+      </p:sp>
+      <p:sp>
+        <p:nvSpPr>
+          <p:cNvPr id="13" name="Rectangle 12">
+            <a:extLst>
+              <a:ext uri="{FF2B5EF4-FFF2-40B4-BE49-F238E27FC236}">
+                <a16:creationId xmlns:a16="http://schemas.microsoft.com/office/drawing/2014/main" id="{C612D5B1-B181-47DD-A449-11ECAFC91870}"/>
+              </a:ext>
+            </a:extLst>
+          </p:cNvPr>
+          <p:cNvSpPr/>
+          <p:nvPr/>
+        </p:nvSpPr>
+        <p:spPr bwMode="gray">
+          <a:xfrm>
+            <a:off x="6912913" y="4275664"/>
+            <a:ext cx="1481470" cy="864781"/>
+          </a:xfrm>
+          <a:prstGeom prst="rect">
+            <a:avLst/>
+          </a:prstGeom>
+          <a:solidFill>
+            <a:schemeClr val="accent5">
+              <a:alpha val="50000"/>
+            </a:schemeClr>
+          </a:solidFill>
+          <a:ln>
+            <a:noFill/>
+          </a:ln>
+        </p:spPr>
+        <p:style>
+          <a:lnRef idx="0">
+            <a:scrgbClr r="0" g="0" b="0"/>
+          </a:lnRef>
+          <a:fillRef idx="0">
+            <a:scrgbClr r="0" g="0" b="0"/>
+          </a:fillRef>
+          <a:effectRef idx="0">
+            <a:scrgbClr r="0" g="0" b="0"/>
+          </a:effectRef>
+          <a:fontRef idx="minor">
+            <a:schemeClr val="lt1"/>
+          </a:fontRef>
+        </p:style>
+        <p:txBody>
+          <a:bodyPr lIns="90000" tIns="72000" rIns="90000" bIns="72000" rtlCol="0" anchor="ctr"/>
+          <a:lstStyle/>
+          <a:p>
+            <a:pPr marR="0" algn="ctr" defTabSz="914400" eaLnBrk="1" fontAlgn="base" latinLnBrk="0" hangingPunct="1">
+              <a:lnSpc>
+                <a:spcPct val="100000"/>
+              </a:lnSpc>
+              <a:spcBef>
+                <a:spcPct val="50000"/>
+              </a:spcBef>
+              <a:spcAft>
+                <a:spcPct val="0"/>
+              </a:spcAft>
+              <a:buClr>
+                <a:srgbClr val="F0AB00"/>
+              </a:buClr>
+              <a:buSzPct val="80000"/>
+              <a:tabLst/>
+            </a:pPr>
+            <a:endParaRPr kumimoji="0" lang="en-US" sz="1800" b="0" i="0" u="none" strike="noStrike" kern="0" cap="none" spc="0" normalizeH="0" baseline="0" noProof="0" dirty="0">
+              <a:ln>
+                <a:noFill/>
+              </a:ln>
+              <a:effectLst/>
+              <a:uLnTx/>
+              <a:uFillTx/>
+              <a:ea typeface="Arial Unicode MS" pitchFamily="34" charset="-128"/>
+              <a:cs typeface="Arial Unicode MS" pitchFamily="34" charset="-128"/>
+            </a:endParaRPr>
+          </a:p>
+        </p:txBody>
+      </p:sp>
+      <p:sp>
+        <p:nvSpPr>
+          <p:cNvPr id="15" name="Rectangle 14">
+            <a:extLst>
+              <a:ext uri="{FF2B5EF4-FFF2-40B4-BE49-F238E27FC236}">
+                <a16:creationId xmlns:a16="http://schemas.microsoft.com/office/drawing/2014/main" id="{EC7E11DF-DEA0-4710-A034-1E2DC0065630}"/>
+              </a:ext>
+            </a:extLst>
+          </p:cNvPr>
+          <p:cNvSpPr/>
+          <p:nvPr/>
+        </p:nvSpPr>
+        <p:spPr bwMode="gray">
+          <a:xfrm>
+            <a:off x="8727538" y="2321047"/>
+            <a:ext cx="2962939" cy="2808766"/>
+          </a:xfrm>
+          <a:prstGeom prst="rect">
+            <a:avLst/>
+          </a:prstGeom>
+          <a:noFill/>
+          <a:ln w="25400" algn="ctr">
+            <a:solidFill>
+              <a:schemeClr val="tx1"/>
+            </a:solidFill>
+            <a:miter lim="800000"/>
+            <a:headEnd/>
+            <a:tailEnd/>
+          </a:ln>
+        </p:spPr>
+        <p:txBody>
+          <a:bodyPr lIns="90000" tIns="72000" rIns="90000" bIns="72000" rtlCol="0" anchor="b"/>
+          <a:lstStyle/>
+          <a:p>
+            <a:pPr marR="0" algn="ctr" defTabSz="914400" eaLnBrk="1" fontAlgn="base" latinLnBrk="0" hangingPunct="1">
+              <a:lnSpc>
+                <a:spcPct val="100000"/>
+              </a:lnSpc>
+              <a:spcBef>
+                <a:spcPct val="50000"/>
+              </a:spcBef>
+              <a:spcAft>
+                <a:spcPct val="0"/>
+              </a:spcAft>
+              <a:buClr>
+                <a:srgbClr val="F0AB00"/>
+              </a:buClr>
+              <a:buSzPct val="80000"/>
+              <a:tabLst/>
+            </a:pPr>
+            <a:endParaRPr kumimoji="0" lang="en-US" sz="1800" b="1" i="0" u="none" strike="noStrike" kern="0" cap="none" spc="0" normalizeH="0" baseline="0" noProof="0" dirty="0">
+              <a:ln>
+                <a:noFill/>
+              </a:ln>
+              <a:effectLst/>
+              <a:uLnTx/>
+              <a:uFillTx/>
+              <a:ea typeface="Arial Unicode MS" pitchFamily="34" charset="-128"/>
+              <a:cs typeface="Arial Unicode MS" pitchFamily="34" charset="-128"/>
+            </a:endParaRPr>
+          </a:p>
+        </p:txBody>
+      </p:sp>
+      <p:sp>
+        <p:nvSpPr>
+          <p:cNvPr id="16" name="Rectangle 15">
+            <a:extLst>
+              <a:ext uri="{FF2B5EF4-FFF2-40B4-BE49-F238E27FC236}">
+                <a16:creationId xmlns:a16="http://schemas.microsoft.com/office/drawing/2014/main" id="{7FDF23CC-3F3D-494B-A2A7-46A652AAB50C}"/>
+              </a:ext>
+            </a:extLst>
+          </p:cNvPr>
+          <p:cNvSpPr/>
+          <p:nvPr/>
+        </p:nvSpPr>
+        <p:spPr bwMode="gray">
+          <a:xfrm>
+            <a:off x="8727537" y="4265032"/>
+            <a:ext cx="1481470" cy="864781"/>
+          </a:xfrm>
+          <a:prstGeom prst="rect">
+            <a:avLst/>
+          </a:prstGeom>
+          <a:ln>
+            <a:headEnd/>
+            <a:tailEnd/>
+          </a:ln>
+        </p:spPr>
+        <p:style>
+          <a:lnRef idx="2">
+            <a:schemeClr val="accent2"/>
+          </a:lnRef>
+          <a:fillRef idx="1">
+            <a:schemeClr val="lt1"/>
+          </a:fillRef>
+          <a:effectRef idx="0">
+            <a:schemeClr val="accent2"/>
+          </a:effectRef>
+          <a:fontRef idx="minor">
+            <a:schemeClr val="dk1"/>
+          </a:fontRef>
+        </p:style>
+        <p:txBody>
+          <a:bodyPr lIns="90000" tIns="72000" rIns="90000" bIns="72000" rtlCol="0" anchor="ctr"/>
+          <a:lstStyle/>
+          <a:p>
+            <a:pPr marR="0" algn="ctr" defTabSz="914400" eaLnBrk="1" fontAlgn="base" latinLnBrk="0" hangingPunct="1">
+              <a:lnSpc>
+                <a:spcPct val="100000"/>
+              </a:lnSpc>
+              <a:spcBef>
+                <a:spcPct val="50000"/>
+              </a:spcBef>
+              <a:spcAft>
+                <a:spcPct val="0"/>
+              </a:spcAft>
+              <a:buClr>
+                <a:srgbClr val="F0AB00"/>
+              </a:buClr>
+              <a:buSzPct val="80000"/>
+              <a:tabLst/>
+            </a:pPr>
+            <a:r>
+              <a:rPr kumimoji="0" lang="en-US" sz="1800" b="0" i="0" u="none" strike="noStrike" kern="0" cap="none" spc="0" normalizeH="0" baseline="0" noProof="0" dirty="0">
+                <a:ln>
+                  <a:noFill/>
+                </a:ln>
+                <a:effectLst/>
+                <a:uLnTx/>
+                <a:uFillTx/>
+                <a:ea typeface="Arial Unicode MS" pitchFamily="34" charset="-128"/>
+                <a:cs typeface="Arial Unicode MS" pitchFamily="34" charset="-128"/>
+              </a:rPr>
+              <a:t>Memory request</a:t>
+            </a:r>
+          </a:p>
+        </p:txBody>
+      </p:sp>
+      <p:sp>
+        <p:nvSpPr>
+          <p:cNvPr id="17" name="Rectangle 16">
+            <a:extLst>
+              <a:ext uri="{FF2B5EF4-FFF2-40B4-BE49-F238E27FC236}">
+                <a16:creationId xmlns:a16="http://schemas.microsoft.com/office/drawing/2014/main" id="{78F354D5-D0CE-4BA1-9D33-A90E5C6BF1EC}"/>
+              </a:ext>
+            </a:extLst>
+          </p:cNvPr>
+          <p:cNvSpPr/>
+          <p:nvPr/>
+        </p:nvSpPr>
+        <p:spPr bwMode="gray">
+          <a:xfrm>
+            <a:off x="10209007" y="3378987"/>
+            <a:ext cx="1481470" cy="864781"/>
+          </a:xfrm>
+          <a:prstGeom prst="rect">
+            <a:avLst/>
+          </a:prstGeom>
+          <a:ln>
+            <a:headEnd/>
+            <a:tailEnd/>
+          </a:ln>
+        </p:spPr>
+        <p:style>
+          <a:lnRef idx="2">
+            <a:schemeClr val="accent2"/>
+          </a:lnRef>
+          <a:fillRef idx="1">
+            <a:schemeClr val="lt1"/>
+          </a:fillRef>
+          <a:effectRef idx="0">
+            <a:schemeClr val="accent2"/>
+          </a:effectRef>
+          <a:fontRef idx="minor">
+            <a:schemeClr val="dk1"/>
+          </a:fontRef>
+        </p:style>
+        <p:txBody>
+          <a:bodyPr lIns="90000" tIns="72000" rIns="90000" bIns="72000" rtlCol="0" anchor="ctr"/>
+          <a:lstStyle/>
+          <a:p>
+            <a:pPr marR="0" algn="ctr" defTabSz="914400" eaLnBrk="1" fontAlgn="base" latinLnBrk="0" hangingPunct="1">
+              <a:lnSpc>
+                <a:spcPct val="100000"/>
+              </a:lnSpc>
+              <a:spcBef>
+                <a:spcPct val="50000"/>
+              </a:spcBef>
+              <a:spcAft>
+                <a:spcPct val="0"/>
+              </a:spcAft>
+              <a:buClr>
+                <a:srgbClr val="F0AB00"/>
+              </a:buClr>
+              <a:buSzPct val="80000"/>
+              <a:tabLst/>
+            </a:pPr>
+            <a:r>
+              <a:rPr kumimoji="0" lang="en-US" sz="1800" b="0" i="0" u="none" strike="noStrike" kern="0" cap="none" spc="0" normalizeH="0" baseline="0" noProof="0" dirty="0">
+                <a:ln>
+                  <a:noFill/>
+                </a:ln>
+                <a:effectLst/>
+                <a:uLnTx/>
+                <a:uFillTx/>
+                <a:ea typeface="Arial Unicode MS" pitchFamily="34" charset="-128"/>
+                <a:cs typeface="Arial Unicode MS" pitchFamily="34" charset="-128"/>
+              </a:rPr>
+              <a:t>Memory request</a:t>
+            </a:r>
+          </a:p>
+        </p:txBody>
+      </p:sp>
+      <p:sp>
+        <p:nvSpPr>
+          <p:cNvPr id="18" name="Rectangle 17">
+            <a:extLst>
+              <a:ext uri="{FF2B5EF4-FFF2-40B4-BE49-F238E27FC236}">
+                <a16:creationId xmlns:a16="http://schemas.microsoft.com/office/drawing/2014/main" id="{E6088C3A-0A4F-472A-AF1D-F4DC8B43D382}"/>
+              </a:ext>
+            </a:extLst>
+          </p:cNvPr>
+          <p:cNvSpPr/>
+          <p:nvPr/>
+        </p:nvSpPr>
+        <p:spPr>
+          <a:xfrm>
+            <a:off x="9098767" y="5301708"/>
+            <a:ext cx="2220480" cy="461665"/>
+          </a:xfrm>
+          <a:prstGeom prst="rect">
+            <a:avLst/>
+          </a:prstGeom>
+        </p:spPr>
+        <p:txBody>
+          <a:bodyPr wrap="none">
+            <a:spAutoFit/>
+          </a:bodyPr>
+          <a:lstStyle/>
+          <a:p>
+            <a:r>
+              <a:rPr lang="en-US" sz="2400" b="1" kern="0" dirty="0">
+                <a:ea typeface="Arial Unicode MS" pitchFamily="34" charset="-128"/>
+                <a:cs typeface="Arial Unicode MS" pitchFamily="34" charset="-128"/>
+              </a:rPr>
+              <a:t>Node Memory</a:t>
+            </a:r>
+            <a:endParaRPr lang="en-US" dirty="0"/>
+          </a:p>
+        </p:txBody>
+      </p:sp>
+      <p:sp>
+        <p:nvSpPr>
+          <p:cNvPr id="19" name="Rectangle 18">
+            <a:extLst>
+              <a:ext uri="{FF2B5EF4-FFF2-40B4-BE49-F238E27FC236}">
+                <a16:creationId xmlns:a16="http://schemas.microsoft.com/office/drawing/2014/main" id="{BFEA3705-A9E2-4B06-8D2D-EF0E849B04DC}"/>
+              </a:ext>
+            </a:extLst>
+          </p:cNvPr>
+          <p:cNvSpPr/>
+          <p:nvPr/>
+        </p:nvSpPr>
+        <p:spPr bwMode="gray">
+          <a:xfrm>
+            <a:off x="8727537" y="2342313"/>
+            <a:ext cx="1481470" cy="1922721"/>
+          </a:xfrm>
+          <a:prstGeom prst="rect">
+            <a:avLst/>
+          </a:prstGeom>
+          <a:ln>
+            <a:headEnd/>
+            <a:tailEnd/>
+          </a:ln>
+        </p:spPr>
+        <p:style>
+          <a:lnRef idx="2">
+            <a:schemeClr val="accent2"/>
+          </a:lnRef>
+          <a:fillRef idx="1">
+            <a:schemeClr val="lt1"/>
+          </a:fillRef>
+          <a:effectRef idx="0">
+            <a:schemeClr val="accent2"/>
+          </a:effectRef>
+          <a:fontRef idx="minor">
+            <a:schemeClr val="dk1"/>
+          </a:fontRef>
+        </p:style>
+        <p:txBody>
+          <a:bodyPr lIns="90000" tIns="72000" rIns="90000" bIns="72000" rtlCol="0" anchor="ctr"/>
+          <a:lstStyle/>
+          <a:p>
+            <a:pPr marR="0" algn="ctr" defTabSz="914400" eaLnBrk="1" fontAlgn="base" latinLnBrk="0" hangingPunct="1">
+              <a:lnSpc>
+                <a:spcPct val="100000"/>
+              </a:lnSpc>
+              <a:spcBef>
+                <a:spcPct val="50000"/>
+              </a:spcBef>
+              <a:spcAft>
+                <a:spcPct val="0"/>
+              </a:spcAft>
+              <a:buClr>
+                <a:srgbClr val="F0AB00"/>
+              </a:buClr>
+              <a:buSzPct val="80000"/>
+              <a:tabLst/>
+            </a:pPr>
+            <a:r>
+              <a:rPr kumimoji="0" lang="en-US" sz="1800" b="0" i="0" u="none" strike="noStrike" kern="0" cap="none" spc="0" normalizeH="0" baseline="0" noProof="0" dirty="0">
+                <a:ln>
+                  <a:noFill/>
+                </a:ln>
+                <a:effectLst/>
+                <a:uLnTx/>
+                <a:uFillTx/>
+                <a:ea typeface="Arial Unicode MS" pitchFamily="34" charset="-128"/>
+                <a:cs typeface="Arial Unicode MS" pitchFamily="34" charset="-128"/>
+              </a:rPr>
+              <a:t>Memory limit</a:t>
+            </a:r>
+          </a:p>
+        </p:txBody>
+      </p:sp>
+      <p:sp>
+        <p:nvSpPr>
+          <p:cNvPr id="20" name="Rectangle 19">
+            <a:extLst>
+              <a:ext uri="{FF2B5EF4-FFF2-40B4-BE49-F238E27FC236}">
+                <a16:creationId xmlns:a16="http://schemas.microsoft.com/office/drawing/2014/main" id="{970E43AE-D50A-48DB-A776-8C45E0B4B52B}"/>
+              </a:ext>
+            </a:extLst>
+          </p:cNvPr>
+          <p:cNvSpPr/>
+          <p:nvPr/>
+        </p:nvSpPr>
+        <p:spPr bwMode="gray">
+          <a:xfrm>
+            <a:off x="10209007" y="1456266"/>
+            <a:ext cx="1481470" cy="1922721"/>
+          </a:xfrm>
+          <a:prstGeom prst="rect">
+            <a:avLst/>
+          </a:prstGeom>
+          <a:ln>
+            <a:headEnd/>
+            <a:tailEnd/>
+          </a:ln>
+        </p:spPr>
+        <p:style>
+          <a:lnRef idx="2">
+            <a:schemeClr val="accent2"/>
+          </a:lnRef>
+          <a:fillRef idx="1">
+            <a:schemeClr val="lt1"/>
+          </a:fillRef>
+          <a:effectRef idx="0">
+            <a:schemeClr val="accent2"/>
+          </a:effectRef>
+          <a:fontRef idx="minor">
+            <a:schemeClr val="dk1"/>
+          </a:fontRef>
+        </p:style>
+        <p:txBody>
+          <a:bodyPr lIns="90000" tIns="72000" rIns="90000" bIns="72000" rtlCol="0" anchor="ctr"/>
+          <a:lstStyle/>
+          <a:p>
+            <a:pPr marR="0" algn="ctr" defTabSz="914400" eaLnBrk="1" fontAlgn="base" latinLnBrk="0" hangingPunct="1">
+              <a:lnSpc>
+                <a:spcPct val="100000"/>
+              </a:lnSpc>
+              <a:spcBef>
+                <a:spcPct val="50000"/>
+              </a:spcBef>
+              <a:spcAft>
+                <a:spcPct val="0"/>
+              </a:spcAft>
+              <a:buClr>
+                <a:srgbClr val="F0AB00"/>
+              </a:buClr>
+              <a:buSzPct val="80000"/>
+              <a:tabLst/>
+            </a:pPr>
+            <a:r>
+              <a:rPr kumimoji="0" lang="en-US" sz="1800" b="0" i="0" u="none" strike="noStrike" kern="0" cap="none" spc="0" normalizeH="0" baseline="0" noProof="0" dirty="0">
+                <a:ln>
+                  <a:noFill/>
+                </a:ln>
+                <a:effectLst/>
+                <a:uLnTx/>
+                <a:uFillTx/>
+                <a:ea typeface="Arial Unicode MS" pitchFamily="34" charset="-128"/>
+                <a:cs typeface="Arial Unicode MS" pitchFamily="34" charset="-128"/>
+              </a:rPr>
+              <a:t>Memory limit</a:t>
+            </a:r>
+          </a:p>
+        </p:txBody>
+      </p:sp>
+      <p:sp>
+        <p:nvSpPr>
+          <p:cNvPr id="21" name="Rectangle 20">
+            <a:extLst>
+              <a:ext uri="{FF2B5EF4-FFF2-40B4-BE49-F238E27FC236}">
+                <a16:creationId xmlns:a16="http://schemas.microsoft.com/office/drawing/2014/main" id="{5B6A06DD-4AF8-4CDE-8810-6556E1DA9EDB}"/>
+              </a:ext>
+            </a:extLst>
+          </p:cNvPr>
+          <p:cNvSpPr/>
+          <p:nvPr/>
+        </p:nvSpPr>
+        <p:spPr bwMode="gray">
+          <a:xfrm>
+            <a:off x="10209007" y="4275664"/>
+            <a:ext cx="1481470" cy="864781"/>
+          </a:xfrm>
+          <a:prstGeom prst="rect">
+            <a:avLst/>
+          </a:prstGeom>
+          <a:solidFill>
+            <a:schemeClr val="accent5">
+              <a:alpha val="50000"/>
+            </a:schemeClr>
+          </a:solidFill>
+          <a:ln>
+            <a:noFill/>
+          </a:ln>
+        </p:spPr>
+        <p:style>
+          <a:lnRef idx="0">
+            <a:scrgbClr r="0" g="0" b="0"/>
+          </a:lnRef>
+          <a:fillRef idx="0">
+            <a:scrgbClr r="0" g="0" b="0"/>
+          </a:fillRef>
+          <a:effectRef idx="0">
+            <a:scrgbClr r="0" g="0" b="0"/>
+          </a:effectRef>
+          <a:fontRef idx="minor">
+            <a:schemeClr val="lt1"/>
+          </a:fontRef>
+        </p:style>
+        <p:txBody>
+          <a:bodyPr lIns="90000" tIns="72000" rIns="90000" bIns="72000" rtlCol="0" anchor="ctr"/>
+          <a:lstStyle/>
+          <a:p>
+            <a:pPr marR="0" algn="ctr" defTabSz="914400" eaLnBrk="1" fontAlgn="base" latinLnBrk="0" hangingPunct="1">
+              <a:lnSpc>
+                <a:spcPct val="100000"/>
+              </a:lnSpc>
+              <a:spcBef>
+                <a:spcPct val="50000"/>
+              </a:spcBef>
+              <a:spcAft>
+                <a:spcPct val="0"/>
+              </a:spcAft>
+              <a:buClr>
+                <a:srgbClr val="F0AB00"/>
+              </a:buClr>
+              <a:buSzPct val="80000"/>
+              <a:tabLst/>
+            </a:pPr>
+            <a:endParaRPr kumimoji="0" lang="en-US" sz="1800" b="0" i="0" u="none" strike="noStrike" kern="0" cap="none" spc="0" normalizeH="0" baseline="0" noProof="0" dirty="0">
+              <a:ln>
+                <a:noFill/>
+              </a:ln>
+              <a:effectLst/>
+              <a:uLnTx/>
+              <a:uFillTx/>
+              <a:ea typeface="Arial Unicode MS" pitchFamily="34" charset="-128"/>
+              <a:cs typeface="Arial Unicode MS" pitchFamily="34" charset="-128"/>
+            </a:endParaRPr>
+          </a:p>
+        </p:txBody>
+      </p:sp>
+    </p:spTree>
+    <p:extLst>
+      <p:ext uri="{BB962C8B-B14F-4D97-AF65-F5344CB8AC3E}">
+        <p14:creationId xmlns:p14="http://schemas.microsoft.com/office/powerpoint/2010/main" val="1678903247"/>
+      </p:ext>
+    </p:extLst>
+  </p:cSld>
+  <p:clrMapOvr>
+    <a:masterClrMapping/>
+  </p:clrMapOvr>
+  <p:timing>
+    <p:tnLst>
+      <p:par>
+        <p:cTn id="1" dur="indefinite" restart="never" nodeType="tmRoot">
+          <p:childTnLst>
+            <p:seq concurrent="1" nextAc="seek">
+              <p:cTn id="2" dur="indefinite" nodeType="mainSeq">
+                <p:childTnLst>
+                  <p:par>
+                    <p:cTn id="3" fill="hold">
+                      <p:stCondLst>
+                        <p:cond delay="indefinite"/>
+                      </p:stCondLst>
+                      <p:childTnLst>
+                        <p:par>
+                          <p:cTn id="4" fill="hold">
+                            <p:stCondLst>
+                              <p:cond delay="0"/>
+                            </p:stCondLst>
+                            <p:childTnLst>
+                              <p:par>
+                                <p:cTn id="5" presetID="1" presetClass="entr" presetSubtype="0" fill="hold" grpId="0" nodeType="clickEffect">
+                                  <p:stCondLst>
+                                    <p:cond delay="0"/>
+                                  </p:stCondLst>
+                                  <p:childTnLst>
+                                    <p:set>
+                                      <p:cBhvr>
+                                        <p:cTn id="6" dur="1" fill="hold">
+                                          <p:stCondLst>
+                                            <p:cond delay="0"/>
+                                          </p:stCondLst>
+                                        </p:cTn>
+                                        <p:tgtEl>
+                                          <p:spTgt spid="7"/>
+                                        </p:tgtEl>
+                                        <p:attrNameLst>
+                                          <p:attrName>style.visibility</p:attrName>
+                                        </p:attrNameLst>
+                                      </p:cBhvr>
+                                      <p:to>
+                                        <p:strVal val="visible"/>
+                                      </p:to>
+                                    </p:set>
+                                  </p:childTnLst>
+                                </p:cTn>
+                              </p:par>
+                              <p:par>
+                                <p:cTn id="7" presetID="1" presetClass="entr" presetSubtype="0" fill="hold" grpId="0" nodeType="withEffect">
+                                  <p:stCondLst>
+                                    <p:cond delay="0"/>
+                                  </p:stCondLst>
+                                  <p:childTnLst>
+                                    <p:set>
+                                      <p:cBhvr>
+                                        <p:cTn id="8" dur="1" fill="hold">
+                                          <p:stCondLst>
+                                            <p:cond delay="0"/>
+                                          </p:stCondLst>
+                                        </p:cTn>
+                                        <p:tgtEl>
+                                          <p:spTgt spid="11"/>
+                                        </p:tgtEl>
+                                        <p:attrNameLst>
+                                          <p:attrName>style.visibility</p:attrName>
+                                        </p:attrNameLst>
+                                      </p:cBhvr>
+                                      <p:to>
+                                        <p:strVal val="visible"/>
+                                      </p:to>
+                                    </p:set>
+                                  </p:childTnLst>
+                                </p:cTn>
+                              </p:par>
+                            </p:childTnLst>
+                          </p:cTn>
+                        </p:par>
+                      </p:childTnLst>
+                    </p:cTn>
+                  </p:par>
+                  <p:par>
+                    <p:cTn id="9" fill="hold">
+                      <p:stCondLst>
+                        <p:cond delay="indefinite"/>
+                      </p:stCondLst>
+                      <p:childTnLst>
+                        <p:par>
+                          <p:cTn id="10" fill="hold">
+                            <p:stCondLst>
+                              <p:cond delay="0"/>
+                            </p:stCondLst>
+                            <p:childTnLst>
+                              <p:par>
+                                <p:cTn id="11" presetID="1" presetClass="entr" presetSubtype="0" fill="hold" grpId="0" nodeType="clickEffect">
+                                  <p:stCondLst>
+                                    <p:cond delay="0"/>
+                                  </p:stCondLst>
+                                  <p:childTnLst>
+                                    <p:set>
+                                      <p:cBhvr>
+                                        <p:cTn id="12" dur="1" fill="hold">
+                                          <p:stCondLst>
+                                            <p:cond delay="0"/>
+                                          </p:stCondLst>
+                                        </p:cTn>
+                                        <p:tgtEl>
+                                          <p:spTgt spid="13"/>
+                                        </p:tgtEl>
+                                        <p:attrNameLst>
+                                          <p:attrName>style.visibility</p:attrName>
+                                        </p:attrNameLst>
+                                      </p:cBhvr>
+                                      <p:to>
+                                        <p:strVal val="visible"/>
+                                      </p:to>
+                                    </p:set>
+                                  </p:childTnLst>
+                                </p:cTn>
+                              </p:par>
+                              <p:par>
+                                <p:cTn id="13" presetID="1" presetClass="entr" presetSubtype="0" fill="hold" grpId="0" nodeType="withEffect">
+                                  <p:stCondLst>
+                                    <p:cond delay="0"/>
+                                  </p:stCondLst>
+                                  <p:childTnLst>
+                                    <p:set>
+                                      <p:cBhvr>
+                                        <p:cTn id="14" dur="1" fill="hold">
+                                          <p:stCondLst>
+                                            <p:cond delay="0"/>
+                                          </p:stCondLst>
+                                        </p:cTn>
+                                        <p:tgtEl>
+                                          <p:spTgt spid="9"/>
+                                        </p:tgtEl>
+                                        <p:attrNameLst>
+                                          <p:attrName>style.visibility</p:attrName>
+                                        </p:attrNameLst>
+                                      </p:cBhvr>
+                                      <p:to>
+                                        <p:strVal val="visible"/>
+                                      </p:to>
+                                    </p:set>
+                                  </p:childTnLst>
+                                </p:cTn>
+                              </p:par>
+                            </p:childTnLst>
+                          </p:cTn>
+                        </p:par>
+                      </p:childTnLst>
+                    </p:cTn>
+                  </p:par>
+                  <p:par>
+                    <p:cTn id="15" fill="hold">
+                      <p:stCondLst>
+                        <p:cond delay="indefinite"/>
+                      </p:stCondLst>
+                      <p:childTnLst>
+                        <p:par>
+                          <p:cTn id="16" fill="hold">
+                            <p:stCondLst>
+                              <p:cond delay="0"/>
+                            </p:stCondLst>
+                            <p:childTnLst>
+                              <p:par>
+                                <p:cTn id="17" presetID="1" presetClass="entr" presetSubtype="0" fill="hold" grpId="0" nodeType="clickEffect">
+                                  <p:stCondLst>
+                                    <p:cond delay="0"/>
+                                  </p:stCondLst>
+                                  <p:childTnLst>
+                                    <p:set>
+                                      <p:cBhvr>
+                                        <p:cTn id="18" dur="1" fill="hold">
+                                          <p:stCondLst>
+                                            <p:cond delay="0"/>
+                                          </p:stCondLst>
+                                        </p:cTn>
+                                        <p:tgtEl>
+                                          <p:spTgt spid="12"/>
+                                        </p:tgtEl>
+                                        <p:attrNameLst>
+                                          <p:attrName>style.visibility</p:attrName>
+                                        </p:attrNameLst>
+                                      </p:cBhvr>
+                                      <p:to>
+                                        <p:strVal val="visible"/>
+                                      </p:to>
+                                    </p:set>
+                                  </p:childTnLst>
+                                </p:cTn>
+                              </p:par>
+                            </p:childTnLst>
+                          </p:cTn>
+                        </p:par>
+                      </p:childTnLst>
+                    </p:cTn>
+                  </p:par>
+                  <p:par>
+                    <p:cTn id="19" fill="hold">
+                      <p:stCondLst>
+                        <p:cond delay="indefinite"/>
+                      </p:stCondLst>
+                      <p:childTnLst>
+                        <p:par>
+                          <p:cTn id="20" fill="hold">
+                            <p:stCondLst>
+                              <p:cond delay="0"/>
+                            </p:stCondLst>
+                            <p:childTnLst>
+                              <p:par>
+                                <p:cTn id="21" presetID="1" presetClass="entr" presetSubtype="0" fill="hold" grpId="0" nodeType="clickEffect">
+                                  <p:stCondLst>
+                                    <p:cond delay="0"/>
+                                  </p:stCondLst>
+                                  <p:childTnLst>
+                                    <p:set>
+                                      <p:cBhvr>
+                                        <p:cTn id="22" dur="1" fill="hold">
+                                          <p:stCondLst>
+                                            <p:cond delay="0"/>
+                                          </p:stCondLst>
+                                        </p:cTn>
+                                        <p:tgtEl>
+                                          <p:spTgt spid="16"/>
+                                        </p:tgtEl>
+                                        <p:attrNameLst>
+                                          <p:attrName>style.visibility</p:attrName>
+                                        </p:attrNameLst>
+                                      </p:cBhvr>
+                                      <p:to>
+                                        <p:strVal val="visible"/>
+                                      </p:to>
+                                    </p:set>
+                                  </p:childTnLst>
+                                </p:cTn>
+                              </p:par>
+                              <p:par>
+                                <p:cTn id="23" presetID="1" presetClass="entr" presetSubtype="0" fill="hold" grpId="0" nodeType="withEffect">
+                                  <p:stCondLst>
+                                    <p:cond delay="0"/>
+                                  </p:stCondLst>
+                                  <p:childTnLst>
+                                    <p:set>
+                                      <p:cBhvr>
+                                        <p:cTn id="24" dur="1" fill="hold">
+                                          <p:stCondLst>
+                                            <p:cond delay="0"/>
+                                          </p:stCondLst>
+                                        </p:cTn>
+                                        <p:tgtEl>
+                                          <p:spTgt spid="19"/>
+                                        </p:tgtEl>
+                                        <p:attrNameLst>
+                                          <p:attrName>style.visibility</p:attrName>
+                                        </p:attrNameLst>
+                                      </p:cBhvr>
+                                      <p:to>
+                                        <p:strVal val="visible"/>
+                                      </p:to>
+                                    </p:set>
+                                  </p:childTnLst>
+                                </p:cTn>
+                              </p:par>
+                            </p:childTnLst>
+                          </p:cTn>
+                        </p:par>
+                      </p:childTnLst>
+                    </p:cTn>
+                  </p:par>
+                  <p:par>
+                    <p:cTn id="25" fill="hold">
+                      <p:stCondLst>
+                        <p:cond delay="indefinite"/>
+                      </p:stCondLst>
+                      <p:childTnLst>
+                        <p:par>
+                          <p:cTn id="26" fill="hold">
+                            <p:stCondLst>
+                              <p:cond delay="0"/>
+                            </p:stCondLst>
+                            <p:childTnLst>
+                              <p:par>
+                                <p:cTn id="27" presetID="1" presetClass="entr" presetSubtype="0" fill="hold" grpId="0" nodeType="clickEffect">
+                                  <p:stCondLst>
+                                    <p:cond delay="0"/>
+                                  </p:stCondLst>
+                                  <p:childTnLst>
+                                    <p:set>
+                                      <p:cBhvr>
+                                        <p:cTn id="28" dur="1" fill="hold">
+                                          <p:stCondLst>
+                                            <p:cond delay="0"/>
+                                          </p:stCondLst>
+                                        </p:cTn>
+                                        <p:tgtEl>
+                                          <p:spTgt spid="21"/>
+                                        </p:tgtEl>
+                                        <p:attrNameLst>
+                                          <p:attrName>style.visibility</p:attrName>
+                                        </p:attrNameLst>
+                                      </p:cBhvr>
+                                      <p:to>
+                                        <p:strVal val="visible"/>
+                                      </p:to>
+                                    </p:set>
+                                  </p:childTnLst>
+                                </p:cTn>
+                              </p:par>
+                              <p:par>
+                                <p:cTn id="29" presetID="1" presetClass="entr" presetSubtype="0" fill="hold" grpId="0" nodeType="withEffect">
+                                  <p:stCondLst>
+                                    <p:cond delay="0"/>
+                                  </p:stCondLst>
+                                  <p:childTnLst>
+                                    <p:set>
+                                      <p:cBhvr>
+                                        <p:cTn id="30" dur="1" fill="hold">
+                                          <p:stCondLst>
+                                            <p:cond delay="0"/>
+                                          </p:stCondLst>
+                                        </p:cTn>
+                                        <p:tgtEl>
+                                          <p:spTgt spid="17"/>
+                                        </p:tgtEl>
+                                        <p:attrNameLst>
+                                          <p:attrName>style.visibility</p:attrName>
+                                        </p:attrNameLst>
+                                      </p:cBhvr>
+                                      <p:to>
+                                        <p:strVal val="visible"/>
+                                      </p:to>
+                                    </p:set>
+                                  </p:childTnLst>
+                                </p:cTn>
+                              </p:par>
+                            </p:childTnLst>
+                          </p:cTn>
+                        </p:par>
+                      </p:childTnLst>
+                    </p:cTn>
+                  </p:par>
+                  <p:par>
+                    <p:cTn id="31" fill="hold">
+                      <p:stCondLst>
+                        <p:cond delay="indefinite"/>
+                      </p:stCondLst>
+                      <p:childTnLst>
+                        <p:par>
+                          <p:cTn id="32" fill="hold">
+                            <p:stCondLst>
+                              <p:cond delay="0"/>
+                            </p:stCondLst>
+                            <p:childTnLst>
+                              <p:par>
+                                <p:cTn id="33" presetID="1" presetClass="entr" presetSubtype="0" fill="hold" grpId="0" nodeType="clickEffect">
+                                  <p:stCondLst>
+                                    <p:cond delay="0"/>
+                                  </p:stCondLst>
+                                  <p:childTnLst>
+                                    <p:set>
+                                      <p:cBhvr>
+                                        <p:cTn id="34" dur="1" fill="hold">
+                                          <p:stCondLst>
+                                            <p:cond delay="0"/>
+                                          </p:stCondLst>
+                                        </p:cTn>
+                                        <p:tgtEl>
+                                          <p:spTgt spid="20"/>
+                                        </p:tgtEl>
+                                        <p:attrNameLst>
+                                          <p:attrName>style.visibility</p:attrName>
+                                        </p:attrNameLst>
+                                      </p:cBhvr>
+                                      <p:to>
+                                        <p:strVal val="visible"/>
+                                      </p:to>
+                                    </p:set>
+                                  </p:childTnLst>
+                                </p:cTn>
+                              </p:par>
+                            </p:childTnLst>
+                          </p:cTn>
+                        </p:par>
+                      </p:childTnLst>
+                    </p:cTn>
+                  </p:par>
+                </p:childTnLst>
+              </p:cTn>
+              <p:prevCondLst>
+                <p:cond evt="onPrev" delay="0">
+                  <p:tgtEl>
+                    <p:sldTgt/>
+                  </p:tgtEl>
+                </p:cond>
+              </p:prevCondLst>
+              <p:nextCondLst>
+                <p:cond evt="onNext" delay="0">
+                  <p:tgtEl>
+                    <p:sldTgt/>
+                  </p:tgtEl>
+                </p:cond>
+              </p:nextCondLst>
+            </p:seq>
+          </p:childTnLst>
+        </p:cTn>
+      </p:par>
+    </p:tnLst>
+    <p:bldLst>
+      <p:bldP spid="7" grpId="0" animBg="1"/>
+      <p:bldP spid="9" grpId="0" animBg="1"/>
+      <p:bldP spid="11" grpId="0" animBg="1"/>
+      <p:bldP spid="12" grpId="0" animBg="1"/>
+      <p:bldP spid="13" grpId="0" animBg="1"/>
+      <p:bldP spid="16" grpId="0" animBg="1"/>
+      <p:bldP spid="17" grpId="0" animBg="1"/>
+      <p:bldP spid="19" grpId="0" animBg="1"/>
+      <p:bldP spid="20" grpId="0" animBg="1"/>
+      <p:bldP spid="21" grpId="0" animBg="1"/>
+    </p:bldLst>
+  </p:timing>
+</p:sld>
+</file>
+
+<file path=ppt/slides/slide17.xml><?xml version="1.0" encoding="utf-8"?>
+<p:sld xmlns:a="http://schemas.openxmlformats.org/drawingml/2006/main" xmlns:r="http://schemas.openxmlformats.org/officeDocument/2006/relationships" xmlns:p="http://schemas.openxmlformats.org/presentationml/2006/main">
+  <p:cSld>
+    <p:spTree>
+      <p:nvGrpSpPr>
+        <p:cNvPr id="1" name=""/>
+        <p:cNvGrpSpPr/>
+        <p:nvPr/>
+      </p:nvGrpSpPr>
+      <p:grpSpPr>
+        <a:xfrm>
+          <a:off x="0" y="0"/>
+          <a:ext cx="0" cy="0"/>
+          <a:chOff x="0" y="0"/>
+          <a:chExt cx="0" cy="0"/>
+        </a:xfrm>
+      </p:grpSpPr>
+      <p:sp>
+        <p:nvSpPr>
+          <p:cNvPr id="2" name="Title 1">
+            <a:extLst>
+              <a:ext uri="{FF2B5EF4-FFF2-40B4-BE49-F238E27FC236}">
+                <a16:creationId xmlns:a16="http://schemas.microsoft.com/office/drawing/2014/main" id="{DC4C30FD-257B-4E9D-9ACD-9FA792606050}"/>
+              </a:ext>
+            </a:extLst>
+          </p:cNvPr>
+          <p:cNvSpPr>
+            <a:spLocks noGrp="1"/>
+          </p:cNvSpPr>
+          <p:nvPr>
+            <p:ph type="title"/>
+          </p:nvPr>
+        </p:nvSpPr>
+        <p:spPr/>
+        <p:txBody>
+          <a:bodyPr/>
+          <a:lstStyle/>
+          <a:p>
+            <a:r>
+              <a:rPr lang="en-US" dirty="0"/>
+              <a:t>Quality of Service classes</a:t>
+            </a:r>
+          </a:p>
+        </p:txBody>
+      </p:sp>
+      <p:grpSp>
+        <p:nvGrpSpPr>
+          <p:cNvPr id="29" name="Group 28">
+            <a:extLst>
+              <a:ext uri="{FF2B5EF4-FFF2-40B4-BE49-F238E27FC236}">
+                <a16:creationId xmlns:a16="http://schemas.microsoft.com/office/drawing/2014/main" id="{84B55095-45D9-4B0F-A762-23D1572F0A97}"/>
+              </a:ext>
+            </a:extLst>
+          </p:cNvPr>
+          <p:cNvGrpSpPr/>
+          <p:nvPr/>
+        </p:nvGrpSpPr>
+        <p:grpSpPr>
+          <a:xfrm>
+            <a:off x="504001" y="2435744"/>
+            <a:ext cx="2962940" cy="3442326"/>
+            <a:chOff x="504001" y="2467639"/>
+            <a:chExt cx="2962940" cy="3442326"/>
+          </a:xfrm>
+        </p:grpSpPr>
+        <p:sp>
+          <p:nvSpPr>
+            <p:cNvPr id="9" name="Rectangle 8">
+              <a:extLst>
+                <a:ext uri="{FF2B5EF4-FFF2-40B4-BE49-F238E27FC236}">
+                  <a16:creationId xmlns:a16="http://schemas.microsoft.com/office/drawing/2014/main" id="{49D10FEA-4FBD-4083-8D2E-3C7C6CC6E4CB}"/>
+                </a:ext>
+              </a:extLst>
+            </p:cNvPr>
+            <p:cNvSpPr/>
+            <p:nvPr/>
+          </p:nvSpPr>
+          <p:spPr bwMode="gray">
+            <a:xfrm>
+              <a:off x="504002" y="2467639"/>
+              <a:ext cx="2962939" cy="2808766"/>
+            </a:xfrm>
+            <a:prstGeom prst="rect">
+              <a:avLst/>
+            </a:prstGeom>
+            <a:noFill/>
+            <a:ln w="25400" algn="ctr">
+              <a:solidFill>
+                <a:schemeClr val="tx1"/>
+              </a:solidFill>
+              <a:miter lim="800000"/>
+              <a:headEnd/>
+              <a:tailEnd/>
+            </a:ln>
+          </p:spPr>
+          <p:txBody>
+            <a:bodyPr lIns="90000" tIns="72000" rIns="90000" bIns="72000" rtlCol="0" anchor="b"/>
+            <a:lstStyle/>
+            <a:p>
+              <a:pPr marR="0" algn="ctr" defTabSz="914400" eaLnBrk="1" fontAlgn="base" latinLnBrk="0" hangingPunct="1">
+                <a:lnSpc>
+                  <a:spcPct val="100000"/>
+                </a:lnSpc>
+                <a:spcBef>
+                  <a:spcPct val="50000"/>
+                </a:spcBef>
+                <a:spcAft>
+                  <a:spcPct val="0"/>
+                </a:spcAft>
+                <a:buClr>
+                  <a:srgbClr val="F0AB00"/>
+                </a:buClr>
+                <a:buSzPct val="80000"/>
+                <a:tabLst/>
+              </a:pPr>
+              <a:endParaRPr kumimoji="0" lang="en-US" sz="1800" b="1" i="0" u="none" strike="noStrike" kern="0" cap="none" spc="0" normalizeH="0" baseline="0" noProof="0" dirty="0">
+                <a:ln>
+                  <a:noFill/>
+                </a:ln>
+                <a:effectLst/>
+                <a:uLnTx/>
+                <a:uFillTx/>
+                <a:ea typeface="Arial Unicode MS" pitchFamily="34" charset="-128"/>
+                <a:cs typeface="Arial Unicode MS" pitchFamily="34" charset="-128"/>
+              </a:endParaRPr>
+            </a:p>
+          </p:txBody>
+        </p:sp>
+        <p:sp>
+          <p:nvSpPr>
+            <p:cNvPr id="10" name="Rectangle 9">
+              <a:extLst>
+                <a:ext uri="{FF2B5EF4-FFF2-40B4-BE49-F238E27FC236}">
+                  <a16:creationId xmlns:a16="http://schemas.microsoft.com/office/drawing/2014/main" id="{EEE2A42C-EAD5-4600-90C6-EFB301BF5064}"/>
+                </a:ext>
+              </a:extLst>
+            </p:cNvPr>
+            <p:cNvSpPr/>
+            <p:nvPr/>
+          </p:nvSpPr>
+          <p:spPr bwMode="gray">
+            <a:xfrm>
+              <a:off x="504001" y="2743200"/>
+              <a:ext cx="1481470" cy="2533206"/>
+            </a:xfrm>
+            <a:prstGeom prst="rect">
+              <a:avLst/>
+            </a:prstGeom>
+            <a:ln>
+              <a:headEnd/>
+              <a:tailEnd/>
+            </a:ln>
+          </p:spPr>
+          <p:style>
+            <a:lnRef idx="2">
+              <a:schemeClr val="accent2"/>
+            </a:lnRef>
+            <a:fillRef idx="1">
+              <a:schemeClr val="lt1"/>
+            </a:fillRef>
+            <a:effectRef idx="0">
+              <a:schemeClr val="accent2"/>
+            </a:effectRef>
+            <a:fontRef idx="minor">
+              <a:schemeClr val="dk1"/>
+            </a:fontRef>
+          </p:style>
+          <p:txBody>
+            <a:bodyPr lIns="90000" tIns="72000" rIns="90000" bIns="72000" rtlCol="0" anchor="ctr"/>
+            <a:lstStyle/>
+            <a:p>
+              <a:pPr marR="0" algn="ctr" defTabSz="914400" eaLnBrk="1" fontAlgn="base" latinLnBrk="0" hangingPunct="1">
+                <a:lnSpc>
+                  <a:spcPct val="100000"/>
+                </a:lnSpc>
+                <a:spcBef>
+                  <a:spcPct val="50000"/>
+                </a:spcBef>
+                <a:spcAft>
+                  <a:spcPct val="0"/>
+                </a:spcAft>
+                <a:buClr>
+                  <a:srgbClr val="F0AB00"/>
+                </a:buClr>
+                <a:buSzPct val="80000"/>
+                <a:tabLst/>
+              </a:pPr>
+              <a:r>
+                <a:rPr kumimoji="0" lang="en-US" sz="1800" b="0" i="0" u="none" strike="noStrike" kern="0" cap="none" spc="0" normalizeH="0" baseline="0" noProof="0" dirty="0">
+                  <a:ln>
+                    <a:noFill/>
+                  </a:ln>
+                  <a:effectLst/>
+                  <a:uLnTx/>
+                  <a:uFillTx/>
+                  <a:ea typeface="Arial Unicode MS" pitchFamily="34" charset="-128"/>
+                  <a:cs typeface="Arial Unicode MS" pitchFamily="34" charset="-128"/>
+                </a:rPr>
+                <a:t>request = limit</a:t>
+              </a:r>
+            </a:p>
+          </p:txBody>
+        </p:sp>
+        <p:sp>
+          <p:nvSpPr>
+            <p:cNvPr id="12" name="Rectangle 11">
+              <a:extLst>
+                <a:ext uri="{FF2B5EF4-FFF2-40B4-BE49-F238E27FC236}">
+                  <a16:creationId xmlns:a16="http://schemas.microsoft.com/office/drawing/2014/main" id="{FBA2EDAA-8957-44E4-B631-370127A55F3B}"/>
+                </a:ext>
+              </a:extLst>
+            </p:cNvPr>
+            <p:cNvSpPr/>
+            <p:nvPr/>
+          </p:nvSpPr>
+          <p:spPr>
+            <a:xfrm>
+              <a:off x="679665" y="5448300"/>
+              <a:ext cx="2611612" cy="461665"/>
+            </a:xfrm>
+            <a:prstGeom prst="rect">
+              <a:avLst/>
+            </a:prstGeom>
+          </p:spPr>
+          <p:txBody>
+            <a:bodyPr wrap="none">
+              <a:spAutoFit/>
+            </a:bodyPr>
+            <a:lstStyle/>
+            <a:p>
+              <a:r>
+                <a:rPr lang="en-US" sz="2400" b="1" kern="0" dirty="0">
+                  <a:ea typeface="Arial Unicode MS" pitchFamily="34" charset="-128"/>
+                  <a:cs typeface="Arial Unicode MS" pitchFamily="34" charset="-128"/>
+                </a:rPr>
+                <a:t>QoS Guaranteed</a:t>
+              </a:r>
+              <a:endParaRPr lang="en-US" dirty="0"/>
+            </a:p>
+          </p:txBody>
+        </p:sp>
+        <p:sp>
+          <p:nvSpPr>
+            <p:cNvPr id="15" name="Rectangle 14">
+              <a:extLst>
+                <a:ext uri="{FF2B5EF4-FFF2-40B4-BE49-F238E27FC236}">
+                  <a16:creationId xmlns:a16="http://schemas.microsoft.com/office/drawing/2014/main" id="{2F9E6949-4A97-4D32-AC63-B163A6939424}"/>
+                </a:ext>
+              </a:extLst>
+            </p:cNvPr>
+            <p:cNvSpPr/>
+            <p:nvPr/>
+          </p:nvSpPr>
+          <p:spPr bwMode="gray">
+            <a:xfrm>
+              <a:off x="1985471" y="2743200"/>
+              <a:ext cx="1481470" cy="2543838"/>
+            </a:xfrm>
+            <a:prstGeom prst="rect">
+              <a:avLst/>
+            </a:prstGeom>
+            <a:solidFill>
+              <a:schemeClr val="accent5">
+                <a:alpha val="50000"/>
+              </a:schemeClr>
+            </a:solidFill>
+            <a:ln>
+              <a:noFill/>
+            </a:ln>
+          </p:spPr>
+          <p:style>
+            <a:lnRef idx="0">
+              <a:scrgbClr r="0" g="0" b="0"/>
+            </a:lnRef>
+            <a:fillRef idx="0">
+              <a:scrgbClr r="0" g="0" b="0"/>
+            </a:fillRef>
+            <a:effectRef idx="0">
+              <a:scrgbClr r="0" g="0" b="0"/>
+            </a:effectRef>
+            <a:fontRef idx="minor">
+              <a:schemeClr val="lt1"/>
+            </a:fontRef>
+          </p:style>
+          <p:txBody>
+            <a:bodyPr lIns="90000" tIns="72000" rIns="90000" bIns="72000" rtlCol="0" anchor="ctr"/>
+            <a:lstStyle/>
+            <a:p>
+              <a:pPr marR="0" algn="ctr" defTabSz="914400" eaLnBrk="1" fontAlgn="base" latinLnBrk="0" hangingPunct="1">
+                <a:lnSpc>
+                  <a:spcPct val="100000"/>
+                </a:lnSpc>
+                <a:spcBef>
+                  <a:spcPct val="50000"/>
+                </a:spcBef>
+                <a:spcAft>
+                  <a:spcPct val="0"/>
+                </a:spcAft>
+                <a:buClr>
+                  <a:srgbClr val="F0AB00"/>
+                </a:buClr>
+                <a:buSzPct val="80000"/>
+                <a:tabLst/>
+              </a:pPr>
+              <a:endParaRPr kumimoji="0" lang="en-US" sz="1800" b="0" i="0" u="none" strike="noStrike" kern="0" cap="none" spc="0" normalizeH="0" baseline="0" noProof="0" dirty="0">
+                <a:ln>
+                  <a:noFill/>
+                </a:ln>
+                <a:effectLst/>
+                <a:uLnTx/>
+                <a:uFillTx/>
+                <a:ea typeface="Arial Unicode MS" pitchFamily="34" charset="-128"/>
+                <a:cs typeface="Arial Unicode MS" pitchFamily="34" charset="-128"/>
+              </a:endParaRPr>
+            </a:p>
+          </p:txBody>
+        </p:sp>
+      </p:grpSp>
+      <p:grpSp>
+        <p:nvGrpSpPr>
+          <p:cNvPr id="30" name="Group 29">
+            <a:extLst>
+              <a:ext uri="{FF2B5EF4-FFF2-40B4-BE49-F238E27FC236}">
+                <a16:creationId xmlns:a16="http://schemas.microsoft.com/office/drawing/2014/main" id="{157AC9C6-2F93-49F1-80F3-33BC5CD31366}"/>
+              </a:ext>
+            </a:extLst>
+          </p:cNvPr>
+          <p:cNvGrpSpPr/>
+          <p:nvPr/>
+        </p:nvGrpSpPr>
+        <p:grpSpPr>
+          <a:xfrm>
+            <a:off x="4616118" y="2435744"/>
+            <a:ext cx="2962940" cy="3411314"/>
+            <a:chOff x="4772746" y="2467639"/>
+            <a:chExt cx="2962940" cy="3411314"/>
+          </a:xfrm>
+        </p:grpSpPr>
+        <p:sp>
+          <p:nvSpPr>
+            <p:cNvPr id="16" name="Rectangle 15">
+              <a:extLst>
+                <a:ext uri="{FF2B5EF4-FFF2-40B4-BE49-F238E27FC236}">
+                  <a16:creationId xmlns:a16="http://schemas.microsoft.com/office/drawing/2014/main" id="{54A31C44-2604-4316-9510-383B1439AFBE}"/>
+                </a:ext>
+              </a:extLst>
+            </p:cNvPr>
+            <p:cNvSpPr/>
+            <p:nvPr/>
+          </p:nvSpPr>
+          <p:spPr bwMode="gray">
+            <a:xfrm>
+              <a:off x="4772747" y="2467639"/>
+              <a:ext cx="2962939" cy="2808766"/>
+            </a:xfrm>
+            <a:prstGeom prst="rect">
+              <a:avLst/>
+            </a:prstGeom>
+            <a:noFill/>
+            <a:ln w="25400" algn="ctr">
+              <a:solidFill>
+                <a:schemeClr val="tx1"/>
+              </a:solidFill>
+              <a:miter lim="800000"/>
+              <a:headEnd/>
+              <a:tailEnd/>
+            </a:ln>
+          </p:spPr>
+          <p:txBody>
+            <a:bodyPr lIns="90000" tIns="72000" rIns="90000" bIns="72000" rtlCol="0" anchor="b"/>
+            <a:lstStyle/>
+            <a:p>
+              <a:pPr marR="0" algn="ctr" defTabSz="914400" eaLnBrk="1" fontAlgn="base" latinLnBrk="0" hangingPunct="1">
+                <a:lnSpc>
+                  <a:spcPct val="100000"/>
+                </a:lnSpc>
+                <a:spcBef>
+                  <a:spcPct val="50000"/>
+                </a:spcBef>
+                <a:spcAft>
+                  <a:spcPct val="0"/>
+                </a:spcAft>
+                <a:buClr>
+                  <a:srgbClr val="F0AB00"/>
+                </a:buClr>
+                <a:buSzPct val="80000"/>
+                <a:tabLst/>
+              </a:pPr>
+              <a:endParaRPr kumimoji="0" lang="en-US" sz="1800" b="1" i="0" u="none" strike="noStrike" kern="0" cap="none" spc="0" normalizeH="0" baseline="0" noProof="0" dirty="0">
+                <a:ln>
+                  <a:noFill/>
+                </a:ln>
+                <a:effectLst/>
+                <a:uLnTx/>
+                <a:uFillTx/>
+                <a:ea typeface="Arial Unicode MS" pitchFamily="34" charset="-128"/>
+                <a:cs typeface="Arial Unicode MS" pitchFamily="34" charset="-128"/>
+              </a:endParaRPr>
+            </a:p>
+          </p:txBody>
+        </p:sp>
+        <p:sp>
+          <p:nvSpPr>
+            <p:cNvPr id="17" name="Rectangle 16">
+              <a:extLst>
+                <a:ext uri="{FF2B5EF4-FFF2-40B4-BE49-F238E27FC236}">
+                  <a16:creationId xmlns:a16="http://schemas.microsoft.com/office/drawing/2014/main" id="{43FDA711-3FE8-4249-B58C-8299C5E35F19}"/>
+                </a:ext>
+              </a:extLst>
+            </p:cNvPr>
+            <p:cNvSpPr/>
+            <p:nvPr/>
+          </p:nvSpPr>
+          <p:spPr bwMode="gray">
+            <a:xfrm>
+              <a:off x="4772746" y="4411624"/>
+              <a:ext cx="1481470" cy="864781"/>
+            </a:xfrm>
+            <a:prstGeom prst="rect">
+              <a:avLst/>
+            </a:prstGeom>
+            <a:ln>
+              <a:headEnd/>
+              <a:tailEnd/>
+            </a:ln>
+          </p:spPr>
+          <p:style>
+            <a:lnRef idx="2">
+              <a:schemeClr val="accent2"/>
+            </a:lnRef>
+            <a:fillRef idx="1">
+              <a:schemeClr val="lt1"/>
+            </a:fillRef>
+            <a:effectRef idx="0">
+              <a:schemeClr val="accent2"/>
+            </a:effectRef>
+            <a:fontRef idx="minor">
+              <a:schemeClr val="dk1"/>
+            </a:fontRef>
+          </p:style>
+          <p:txBody>
+            <a:bodyPr lIns="90000" tIns="72000" rIns="90000" bIns="72000" rtlCol="0" anchor="ctr"/>
+            <a:lstStyle/>
+            <a:p>
+              <a:pPr marR="0" algn="ctr" defTabSz="914400" eaLnBrk="1" fontAlgn="base" latinLnBrk="0" hangingPunct="1">
+                <a:lnSpc>
+                  <a:spcPct val="100000"/>
+                </a:lnSpc>
+                <a:spcBef>
+                  <a:spcPct val="50000"/>
+                </a:spcBef>
+                <a:spcAft>
+                  <a:spcPct val="0"/>
+                </a:spcAft>
+                <a:buClr>
+                  <a:srgbClr val="F0AB00"/>
+                </a:buClr>
+                <a:buSzPct val="80000"/>
+                <a:tabLst/>
+              </a:pPr>
+              <a:r>
+                <a:rPr kumimoji="0" lang="en-US" sz="1800" b="0" i="0" u="none" strike="noStrike" kern="0" cap="none" spc="0" normalizeH="0" baseline="0" noProof="0" dirty="0">
+                  <a:ln>
+                    <a:noFill/>
+                  </a:ln>
+                  <a:effectLst/>
+                  <a:uLnTx/>
+                  <a:uFillTx/>
+                  <a:ea typeface="Arial Unicode MS" pitchFamily="34" charset="-128"/>
+                  <a:cs typeface="Arial Unicode MS" pitchFamily="34" charset="-128"/>
+                </a:rPr>
+                <a:t>CPU request</a:t>
+              </a:r>
+            </a:p>
+          </p:txBody>
+        </p:sp>
+        <p:sp>
+          <p:nvSpPr>
+            <p:cNvPr id="18" name="Rectangle 17">
+              <a:extLst>
+                <a:ext uri="{FF2B5EF4-FFF2-40B4-BE49-F238E27FC236}">
+                  <a16:creationId xmlns:a16="http://schemas.microsoft.com/office/drawing/2014/main" id="{85878579-39CD-4C19-9A41-2961FFC3C8D7}"/>
+                </a:ext>
+              </a:extLst>
+            </p:cNvPr>
+            <p:cNvSpPr/>
+            <p:nvPr/>
+          </p:nvSpPr>
+          <p:spPr bwMode="gray">
+            <a:xfrm>
+              <a:off x="6254216" y="3525579"/>
+              <a:ext cx="1481470" cy="864781"/>
+            </a:xfrm>
+            <a:prstGeom prst="rect">
+              <a:avLst/>
+            </a:prstGeom>
+            <a:ln>
+              <a:headEnd/>
+              <a:tailEnd/>
+            </a:ln>
+          </p:spPr>
+          <p:style>
+            <a:lnRef idx="2">
+              <a:schemeClr val="accent2"/>
+            </a:lnRef>
+            <a:fillRef idx="1">
+              <a:schemeClr val="lt1"/>
+            </a:fillRef>
+            <a:effectRef idx="0">
+              <a:schemeClr val="accent2"/>
+            </a:effectRef>
+            <a:fontRef idx="minor">
+              <a:schemeClr val="dk1"/>
+            </a:fontRef>
+          </p:style>
+          <p:txBody>
+            <a:bodyPr lIns="90000" tIns="72000" rIns="90000" bIns="72000" rtlCol="0" anchor="ctr"/>
+            <a:lstStyle/>
+            <a:p>
+              <a:pPr marR="0" algn="ctr" defTabSz="914400" eaLnBrk="1" fontAlgn="base" latinLnBrk="0" hangingPunct="1">
+                <a:lnSpc>
+                  <a:spcPct val="100000"/>
+                </a:lnSpc>
+                <a:spcBef>
+                  <a:spcPct val="50000"/>
+                </a:spcBef>
+                <a:spcAft>
+                  <a:spcPct val="0"/>
+                </a:spcAft>
+                <a:buClr>
+                  <a:srgbClr val="F0AB00"/>
+                </a:buClr>
+                <a:buSzPct val="80000"/>
+                <a:tabLst/>
+              </a:pPr>
+              <a:r>
+                <a:rPr kumimoji="0" lang="en-US" sz="1800" b="0" i="0" u="none" strike="noStrike" kern="0" cap="none" spc="0" normalizeH="0" baseline="0" noProof="0" dirty="0">
+                  <a:ln>
+                    <a:noFill/>
+                  </a:ln>
+                  <a:effectLst/>
+                  <a:uLnTx/>
+                  <a:uFillTx/>
+                  <a:ea typeface="Arial Unicode MS" pitchFamily="34" charset="-128"/>
+                  <a:cs typeface="Arial Unicode MS" pitchFamily="34" charset="-128"/>
+                </a:rPr>
+                <a:t>CPU request</a:t>
+              </a:r>
+            </a:p>
+          </p:txBody>
+        </p:sp>
+        <p:sp>
+          <p:nvSpPr>
+            <p:cNvPr id="19" name="Rectangle 18">
+              <a:extLst>
+                <a:ext uri="{FF2B5EF4-FFF2-40B4-BE49-F238E27FC236}">
+                  <a16:creationId xmlns:a16="http://schemas.microsoft.com/office/drawing/2014/main" id="{152CED82-9D71-4B30-A458-DE2883F61FA5}"/>
+                </a:ext>
+              </a:extLst>
+            </p:cNvPr>
+            <p:cNvSpPr/>
+            <p:nvPr/>
+          </p:nvSpPr>
+          <p:spPr>
+            <a:xfrm>
+              <a:off x="5093481" y="5417288"/>
+              <a:ext cx="2321469" cy="461665"/>
+            </a:xfrm>
+            <a:prstGeom prst="rect">
+              <a:avLst/>
+            </a:prstGeom>
+          </p:spPr>
+          <p:txBody>
+            <a:bodyPr wrap="none">
+              <a:spAutoFit/>
+            </a:bodyPr>
+            <a:lstStyle/>
+            <a:p>
+              <a:r>
+                <a:rPr lang="en-US" sz="2400" b="1" kern="0" dirty="0">
+                  <a:ea typeface="Arial Unicode MS" pitchFamily="34" charset="-128"/>
+                  <a:cs typeface="Arial Unicode MS" pitchFamily="34" charset="-128"/>
+                </a:rPr>
+                <a:t>QoS Burstable</a:t>
+              </a:r>
+              <a:endParaRPr lang="en-US" dirty="0"/>
+            </a:p>
+          </p:txBody>
+        </p:sp>
+        <p:sp>
+          <p:nvSpPr>
+            <p:cNvPr id="20" name="Rectangle 19">
+              <a:extLst>
+                <a:ext uri="{FF2B5EF4-FFF2-40B4-BE49-F238E27FC236}">
+                  <a16:creationId xmlns:a16="http://schemas.microsoft.com/office/drawing/2014/main" id="{A0CAE38E-2894-42F0-9257-0026CE9C49E1}"/>
+                </a:ext>
+              </a:extLst>
+            </p:cNvPr>
+            <p:cNvSpPr/>
+            <p:nvPr/>
+          </p:nvSpPr>
+          <p:spPr bwMode="gray">
+            <a:xfrm>
+              <a:off x="4772746" y="2467639"/>
+              <a:ext cx="1481470" cy="1922721"/>
+            </a:xfrm>
+            <a:prstGeom prst="rect">
+              <a:avLst/>
+            </a:prstGeom>
+            <a:ln>
+              <a:headEnd/>
+              <a:tailEnd/>
+            </a:ln>
+          </p:spPr>
+          <p:style>
+            <a:lnRef idx="2">
+              <a:schemeClr val="accent2"/>
+            </a:lnRef>
+            <a:fillRef idx="1">
+              <a:schemeClr val="lt1"/>
+            </a:fillRef>
+            <a:effectRef idx="0">
+              <a:schemeClr val="accent2"/>
+            </a:effectRef>
+            <a:fontRef idx="minor">
+              <a:schemeClr val="dk1"/>
+            </a:fontRef>
+          </p:style>
+          <p:txBody>
+            <a:bodyPr lIns="90000" tIns="72000" rIns="90000" bIns="72000" rtlCol="0" anchor="ctr"/>
+            <a:lstStyle/>
+            <a:p>
+              <a:pPr marR="0" algn="ctr" defTabSz="914400" eaLnBrk="1" fontAlgn="base" latinLnBrk="0" hangingPunct="1">
+                <a:lnSpc>
+                  <a:spcPct val="100000"/>
+                </a:lnSpc>
+                <a:spcBef>
+                  <a:spcPct val="50000"/>
+                </a:spcBef>
+                <a:spcAft>
+                  <a:spcPct val="0"/>
+                </a:spcAft>
+                <a:buClr>
+                  <a:srgbClr val="F0AB00"/>
+                </a:buClr>
+                <a:buSzPct val="80000"/>
+                <a:tabLst/>
+              </a:pPr>
+              <a:r>
+                <a:rPr kumimoji="0" lang="en-US" sz="1800" b="0" i="0" u="none" strike="noStrike" kern="0" cap="none" spc="0" normalizeH="0" baseline="0" noProof="0" dirty="0">
+                  <a:ln>
+                    <a:noFill/>
+                  </a:ln>
+                  <a:effectLst/>
+                  <a:uLnTx/>
+                  <a:uFillTx/>
+                  <a:ea typeface="Arial Unicode MS" pitchFamily="34" charset="-128"/>
+                  <a:cs typeface="Arial Unicode MS" pitchFamily="34" charset="-128"/>
+                </a:rPr>
+                <a:t>CPU limit</a:t>
+              </a:r>
+            </a:p>
+          </p:txBody>
+        </p:sp>
+        <p:sp>
+          <p:nvSpPr>
+            <p:cNvPr id="22" name="Rectangle 21">
+              <a:extLst>
+                <a:ext uri="{FF2B5EF4-FFF2-40B4-BE49-F238E27FC236}">
+                  <a16:creationId xmlns:a16="http://schemas.microsoft.com/office/drawing/2014/main" id="{3E8D6915-3AB6-4C7A-8EC3-3D6B941CCDBB}"/>
+                </a:ext>
+              </a:extLst>
+            </p:cNvPr>
+            <p:cNvSpPr/>
+            <p:nvPr/>
+          </p:nvSpPr>
+          <p:spPr bwMode="gray">
+            <a:xfrm>
+              <a:off x="6254216" y="4422256"/>
+              <a:ext cx="1481470" cy="864781"/>
+            </a:xfrm>
+            <a:prstGeom prst="rect">
+              <a:avLst/>
+            </a:prstGeom>
+            <a:solidFill>
+              <a:schemeClr val="accent5">
+                <a:alpha val="50000"/>
+              </a:schemeClr>
+            </a:solidFill>
+            <a:ln>
+              <a:noFill/>
+            </a:ln>
+          </p:spPr>
+          <p:style>
+            <a:lnRef idx="0">
+              <a:scrgbClr r="0" g="0" b="0"/>
+            </a:lnRef>
+            <a:fillRef idx="0">
+              <a:scrgbClr r="0" g="0" b="0"/>
+            </a:fillRef>
+            <a:effectRef idx="0">
+              <a:scrgbClr r="0" g="0" b="0"/>
+            </a:effectRef>
+            <a:fontRef idx="minor">
+              <a:schemeClr val="lt1"/>
+            </a:fontRef>
+          </p:style>
+          <p:txBody>
+            <a:bodyPr lIns="90000" tIns="72000" rIns="90000" bIns="72000" rtlCol="0" anchor="ctr"/>
+            <a:lstStyle/>
+            <a:p>
+              <a:pPr marR="0" algn="ctr" defTabSz="914400" eaLnBrk="1" fontAlgn="base" latinLnBrk="0" hangingPunct="1">
+                <a:lnSpc>
+                  <a:spcPct val="100000"/>
+                </a:lnSpc>
+                <a:spcBef>
+                  <a:spcPct val="50000"/>
+                </a:spcBef>
+                <a:spcAft>
+                  <a:spcPct val="0"/>
+                </a:spcAft>
+                <a:buClr>
+                  <a:srgbClr val="F0AB00"/>
+                </a:buClr>
+                <a:buSzPct val="80000"/>
+                <a:tabLst/>
+              </a:pPr>
+              <a:endParaRPr kumimoji="0" lang="en-US" sz="1800" b="0" i="0" u="none" strike="noStrike" kern="0" cap="none" spc="0" normalizeH="0" baseline="0" noProof="0" dirty="0">
+                <a:ln>
+                  <a:noFill/>
+                </a:ln>
+                <a:effectLst/>
+                <a:uLnTx/>
+                <a:uFillTx/>
+                <a:ea typeface="Arial Unicode MS" pitchFamily="34" charset="-128"/>
+                <a:cs typeface="Arial Unicode MS" pitchFamily="34" charset="-128"/>
+              </a:endParaRPr>
+            </a:p>
+          </p:txBody>
+        </p:sp>
+      </p:grpSp>
+      <p:grpSp>
+        <p:nvGrpSpPr>
+          <p:cNvPr id="32" name="Group 31">
+            <a:extLst>
+              <a:ext uri="{FF2B5EF4-FFF2-40B4-BE49-F238E27FC236}">
+                <a16:creationId xmlns:a16="http://schemas.microsoft.com/office/drawing/2014/main" id="{34EE5F69-7C04-4F8C-A3C1-D3C1E0097A61}"/>
+              </a:ext>
+            </a:extLst>
+          </p:cNvPr>
+          <p:cNvGrpSpPr/>
+          <p:nvPr/>
+        </p:nvGrpSpPr>
+        <p:grpSpPr>
+          <a:xfrm>
+            <a:off x="8728235" y="2435744"/>
+            <a:ext cx="2968932" cy="3443209"/>
+            <a:chOff x="8728235" y="2435744"/>
+            <a:chExt cx="2968932" cy="3443209"/>
+          </a:xfrm>
+        </p:grpSpPr>
+        <p:sp>
+          <p:nvSpPr>
+            <p:cNvPr id="23" name="Rectangle 22">
+              <a:extLst>
+                <a:ext uri="{FF2B5EF4-FFF2-40B4-BE49-F238E27FC236}">
+                  <a16:creationId xmlns:a16="http://schemas.microsoft.com/office/drawing/2014/main" id="{1477B240-DCC0-45D6-9FD6-BB09D1015C57}"/>
+                </a:ext>
+              </a:extLst>
+            </p:cNvPr>
+            <p:cNvSpPr/>
+            <p:nvPr/>
+          </p:nvSpPr>
+          <p:spPr bwMode="gray">
+            <a:xfrm>
+              <a:off x="8728236" y="2435744"/>
+              <a:ext cx="2962939" cy="2808766"/>
+            </a:xfrm>
+            <a:prstGeom prst="rect">
+              <a:avLst/>
+            </a:prstGeom>
+            <a:noFill/>
+            <a:ln w="25400" algn="ctr">
+              <a:solidFill>
+                <a:schemeClr val="tx1"/>
+              </a:solidFill>
+              <a:miter lim="800000"/>
+              <a:headEnd/>
+              <a:tailEnd/>
+            </a:ln>
+          </p:spPr>
+          <p:txBody>
+            <a:bodyPr lIns="90000" tIns="72000" rIns="90000" bIns="72000" rtlCol="0" anchor="b"/>
+            <a:lstStyle/>
+            <a:p>
+              <a:pPr marR="0" algn="ctr" defTabSz="914400" eaLnBrk="1" fontAlgn="base" latinLnBrk="0" hangingPunct="1">
+                <a:lnSpc>
+                  <a:spcPct val="100000"/>
+                </a:lnSpc>
+                <a:spcBef>
+                  <a:spcPct val="50000"/>
+                </a:spcBef>
+                <a:spcAft>
+                  <a:spcPct val="0"/>
+                </a:spcAft>
+                <a:buClr>
+                  <a:srgbClr val="F0AB00"/>
+                </a:buClr>
+                <a:buSzPct val="80000"/>
+                <a:tabLst/>
+              </a:pPr>
+              <a:endParaRPr kumimoji="0" lang="en-US" sz="1800" b="1" i="0" u="none" strike="noStrike" kern="0" cap="none" spc="0" normalizeH="0" baseline="0" noProof="0" dirty="0">
+                <a:ln>
+                  <a:noFill/>
+                </a:ln>
+                <a:effectLst/>
+                <a:uLnTx/>
+                <a:uFillTx/>
+                <a:ea typeface="Arial Unicode MS" pitchFamily="34" charset="-128"/>
+                <a:cs typeface="Arial Unicode MS" pitchFamily="34" charset="-128"/>
+              </a:endParaRPr>
+            </a:p>
+          </p:txBody>
+        </p:sp>
+        <p:sp>
+          <p:nvSpPr>
+            <p:cNvPr id="24" name="Rectangle 23">
+              <a:extLst>
+                <a:ext uri="{FF2B5EF4-FFF2-40B4-BE49-F238E27FC236}">
+                  <a16:creationId xmlns:a16="http://schemas.microsoft.com/office/drawing/2014/main" id="{B0CAC004-8D43-4407-92E9-2781B366C5DF}"/>
+                </a:ext>
+              </a:extLst>
+            </p:cNvPr>
+            <p:cNvSpPr/>
+            <p:nvPr/>
+          </p:nvSpPr>
+          <p:spPr bwMode="gray">
+            <a:xfrm>
+              <a:off x="8728235" y="2435745"/>
+              <a:ext cx="1481470" cy="2808766"/>
+            </a:xfrm>
+            <a:prstGeom prst="rect">
+              <a:avLst/>
+            </a:prstGeom>
+            <a:ln>
+              <a:headEnd/>
+              <a:tailEnd/>
+            </a:ln>
+          </p:spPr>
+          <p:style>
+            <a:lnRef idx="2">
+              <a:schemeClr val="accent2"/>
+            </a:lnRef>
+            <a:fillRef idx="1">
+              <a:schemeClr val="lt1"/>
+            </a:fillRef>
+            <a:effectRef idx="0">
+              <a:schemeClr val="accent2"/>
+            </a:effectRef>
+            <a:fontRef idx="minor">
+              <a:schemeClr val="dk1"/>
+            </a:fontRef>
+          </p:style>
+          <p:txBody>
+            <a:bodyPr lIns="90000" tIns="72000" rIns="90000" bIns="72000" rtlCol="0" anchor="ctr"/>
+            <a:lstStyle/>
+            <a:p>
+              <a:pPr marR="0" algn="ctr" defTabSz="914400" eaLnBrk="1" fontAlgn="base" latinLnBrk="0" hangingPunct="1">
+                <a:lnSpc>
+                  <a:spcPct val="100000"/>
+                </a:lnSpc>
+                <a:spcBef>
+                  <a:spcPct val="50000"/>
+                </a:spcBef>
+                <a:spcAft>
+                  <a:spcPct val="0"/>
+                </a:spcAft>
+                <a:buClr>
+                  <a:srgbClr val="F0AB00"/>
+                </a:buClr>
+                <a:buSzPct val="80000"/>
+                <a:tabLst/>
+              </a:pPr>
+              <a:r>
+                <a:rPr kumimoji="0" lang="en-US" sz="1800" b="0" i="0" u="none" strike="noStrike" kern="0" cap="none" spc="0" normalizeH="0" baseline="0" noProof="0" dirty="0">
+                  <a:ln>
+                    <a:noFill/>
+                  </a:ln>
+                  <a:effectLst/>
+                  <a:uLnTx/>
+                  <a:uFillTx/>
+                  <a:ea typeface="Arial Unicode MS" pitchFamily="34" charset="-128"/>
+                  <a:cs typeface="Arial Unicode MS" pitchFamily="34" charset="-128"/>
+                </a:rPr>
+                <a:t>No request</a:t>
+              </a:r>
+            </a:p>
+          </p:txBody>
+        </p:sp>
+        <p:sp>
+          <p:nvSpPr>
+            <p:cNvPr id="26" name="Rectangle 25">
+              <a:extLst>
+                <a:ext uri="{FF2B5EF4-FFF2-40B4-BE49-F238E27FC236}">
+                  <a16:creationId xmlns:a16="http://schemas.microsoft.com/office/drawing/2014/main" id="{6A7D7F88-50AB-45FB-90FB-7F41A0017DB0}"/>
+                </a:ext>
+              </a:extLst>
+            </p:cNvPr>
+            <p:cNvSpPr/>
+            <p:nvPr/>
+          </p:nvSpPr>
+          <p:spPr>
+            <a:xfrm>
+              <a:off x="8972026" y="5417288"/>
+              <a:ext cx="2475358" cy="461665"/>
+            </a:xfrm>
+            <a:prstGeom prst="rect">
+              <a:avLst/>
+            </a:prstGeom>
+          </p:spPr>
+          <p:txBody>
+            <a:bodyPr wrap="none">
+              <a:spAutoFit/>
+            </a:bodyPr>
+            <a:lstStyle/>
+            <a:p>
+              <a:r>
+                <a:rPr lang="en-US" sz="2400" b="1" kern="0" dirty="0">
+                  <a:ea typeface="Arial Unicode MS" pitchFamily="34" charset="-128"/>
+                  <a:cs typeface="Arial Unicode MS" pitchFamily="34" charset="-128"/>
+                </a:rPr>
+                <a:t>QoS Best Effort</a:t>
+              </a:r>
+              <a:endParaRPr lang="en-US" dirty="0"/>
+            </a:p>
+          </p:txBody>
+        </p:sp>
+        <p:sp>
+          <p:nvSpPr>
+            <p:cNvPr id="31" name="Rectangle 30">
+              <a:extLst>
+                <a:ext uri="{FF2B5EF4-FFF2-40B4-BE49-F238E27FC236}">
+                  <a16:creationId xmlns:a16="http://schemas.microsoft.com/office/drawing/2014/main" id="{6A6C7AEE-5F48-424E-9C91-03B1596392BD}"/>
+                </a:ext>
+              </a:extLst>
+            </p:cNvPr>
+            <p:cNvSpPr/>
+            <p:nvPr/>
+          </p:nvSpPr>
+          <p:spPr bwMode="gray">
+            <a:xfrm>
+              <a:off x="10215697" y="2435744"/>
+              <a:ext cx="1481470" cy="2808766"/>
+            </a:xfrm>
+            <a:prstGeom prst="rect">
+              <a:avLst/>
+            </a:prstGeom>
+            <a:ln>
+              <a:headEnd/>
+              <a:tailEnd/>
+            </a:ln>
+          </p:spPr>
+          <p:style>
+            <a:lnRef idx="2">
+              <a:schemeClr val="accent2"/>
+            </a:lnRef>
+            <a:fillRef idx="1">
+              <a:schemeClr val="lt1"/>
+            </a:fillRef>
+            <a:effectRef idx="0">
+              <a:schemeClr val="accent2"/>
+            </a:effectRef>
+            <a:fontRef idx="minor">
+              <a:schemeClr val="dk1"/>
+            </a:fontRef>
+          </p:style>
+          <p:txBody>
+            <a:bodyPr lIns="90000" tIns="72000" rIns="90000" bIns="72000" rtlCol="0" anchor="ctr"/>
+            <a:lstStyle/>
+            <a:p>
+              <a:pPr marR="0" algn="ctr" defTabSz="914400" eaLnBrk="1" fontAlgn="base" latinLnBrk="0" hangingPunct="1">
+                <a:lnSpc>
+                  <a:spcPct val="100000"/>
+                </a:lnSpc>
+                <a:spcBef>
+                  <a:spcPct val="50000"/>
+                </a:spcBef>
+                <a:spcAft>
+                  <a:spcPct val="0"/>
+                </a:spcAft>
+                <a:buClr>
+                  <a:srgbClr val="F0AB00"/>
+                </a:buClr>
+                <a:buSzPct val="80000"/>
+                <a:tabLst/>
+              </a:pPr>
+              <a:r>
+                <a:rPr kumimoji="0" lang="en-US" sz="1800" b="0" i="0" u="none" strike="noStrike" kern="0" cap="none" spc="0" normalizeH="0" baseline="0" noProof="0" dirty="0">
+                  <a:ln>
+                    <a:noFill/>
+                  </a:ln>
+                  <a:effectLst/>
+                  <a:uLnTx/>
+                  <a:uFillTx/>
+                  <a:ea typeface="Arial Unicode MS" pitchFamily="34" charset="-128"/>
+                  <a:cs typeface="Arial Unicode MS" pitchFamily="34" charset="-128"/>
+                </a:rPr>
+                <a:t>No request</a:t>
+              </a:r>
+            </a:p>
+          </p:txBody>
+        </p:sp>
+      </p:grpSp>
+      <p:pic>
+        <p:nvPicPr>
+          <p:cNvPr id="33" name="Graphic 32" descr="Skull">
+            <a:extLst>
+              <a:ext uri="{FF2B5EF4-FFF2-40B4-BE49-F238E27FC236}">
+                <a16:creationId xmlns:a16="http://schemas.microsoft.com/office/drawing/2014/main" id="{4C2306FC-A146-47C0-AB8C-191062A3F746}"/>
+              </a:ext>
+            </a:extLst>
+          </p:cNvPr>
+          <p:cNvPicPr>
+            <a:picLocks noChangeAspect="1"/>
+          </p:cNvPicPr>
+          <p:nvPr/>
+        </p:nvPicPr>
+        <p:blipFill>
+          <a:blip r:embed="rId3">
+            <a:extLst>
+              <a:ext uri="{96DAC541-7B7A-43D3-8B79-37D633B846F1}">
+                <asvg:svgBlip xmlns:asvg="http://schemas.microsoft.com/office/drawing/2016/SVG/main" r:embed="rId4"/>
+              </a:ext>
+            </a:extLst>
+          </a:blip>
+          <a:stretch>
+            <a:fillRect/>
+          </a:stretch>
+        </p:blipFill>
+        <p:spPr>
+          <a:xfrm>
+            <a:off x="9011770" y="2579284"/>
+            <a:ext cx="914400" cy="914400"/>
+          </a:xfrm>
+          <a:prstGeom prst="rect">
+            <a:avLst/>
+          </a:prstGeom>
+        </p:spPr>
+      </p:pic>
+      <p:pic>
+        <p:nvPicPr>
+          <p:cNvPr id="34" name="Graphic 33" descr="Skull">
+            <a:extLst>
+              <a:ext uri="{FF2B5EF4-FFF2-40B4-BE49-F238E27FC236}">
+                <a16:creationId xmlns:a16="http://schemas.microsoft.com/office/drawing/2014/main" id="{F0B76DBA-6188-414D-82C1-3EE683A52639}"/>
+              </a:ext>
+            </a:extLst>
+          </p:cNvPr>
+          <p:cNvPicPr>
+            <a:picLocks noChangeAspect="1"/>
+          </p:cNvPicPr>
+          <p:nvPr/>
+        </p:nvPicPr>
+        <p:blipFill>
+          <a:blip r:embed="rId3">
+            <a:extLst>
+              <a:ext uri="{96DAC541-7B7A-43D3-8B79-37D633B846F1}">
+                <asvg:svgBlip xmlns:asvg="http://schemas.microsoft.com/office/drawing/2016/SVG/main" r:embed="rId5"/>
+              </a:ext>
+            </a:extLst>
+          </a:blip>
+          <a:stretch>
+            <a:fillRect/>
+          </a:stretch>
+        </p:blipFill>
+        <p:spPr>
+          <a:xfrm>
+            <a:off x="10499232" y="2579284"/>
+            <a:ext cx="914400" cy="914400"/>
+          </a:xfrm>
+          <a:prstGeom prst="rect">
+            <a:avLst/>
+          </a:prstGeom>
+        </p:spPr>
+      </p:pic>
+      <p:sp>
+        <p:nvSpPr>
+          <p:cNvPr id="3" name="Rectangle 2">
+            <a:extLst>
+              <a:ext uri="{FF2B5EF4-FFF2-40B4-BE49-F238E27FC236}">
+                <a16:creationId xmlns:a16="http://schemas.microsoft.com/office/drawing/2014/main" id="{3E4124A6-6629-4E6D-A398-89299F1B6D2B}"/>
+              </a:ext>
+            </a:extLst>
+          </p:cNvPr>
+          <p:cNvSpPr/>
+          <p:nvPr/>
+        </p:nvSpPr>
+        <p:spPr>
+          <a:xfrm>
+            <a:off x="504000" y="979930"/>
+            <a:ext cx="9422169" cy="415498"/>
+          </a:xfrm>
+          <a:prstGeom prst="rect">
+            <a:avLst/>
+          </a:prstGeom>
+        </p:spPr>
+        <p:txBody>
+          <a:bodyPr wrap="square">
+            <a:spAutoFit/>
+          </a:bodyPr>
+          <a:lstStyle/>
+          <a:p>
+            <a:r>
+              <a:rPr lang="de-DE" dirty="0">
+                <a:hlinkClick r:id="rId6"/>
+              </a:rPr>
+              <a:t>https://kubernetes.io/docs/tasks/configure-pod-container/quality-service-pod/</a:t>
+            </a:r>
+            <a:endParaRPr lang="en-US" dirty="0"/>
+          </a:p>
+        </p:txBody>
+      </p:sp>
+    </p:spTree>
+    <p:extLst>
+      <p:ext uri="{BB962C8B-B14F-4D97-AF65-F5344CB8AC3E}">
+        <p14:creationId xmlns:p14="http://schemas.microsoft.com/office/powerpoint/2010/main" val="2786711765"/>
+      </p:ext>
+    </p:extLst>
+  </p:cSld>
+  <p:clrMapOvr>
+    <a:masterClrMapping/>
+  </p:clrMapOvr>
+  <p:timing>
+    <p:tnLst>
+      <p:par>
+        <p:cTn id="1" dur="indefinite" restart="never" nodeType="tmRoot">
+          <p:childTnLst>
+            <p:seq concurrent="1" nextAc="seek">
+              <p:cTn id="2" dur="indefinite" nodeType="mainSeq">
+                <p:childTnLst>
+                  <p:par>
+                    <p:cTn id="3" fill="hold">
+                      <p:stCondLst>
+                        <p:cond delay="indefinite"/>
+                      </p:stCondLst>
+                      <p:childTnLst>
+                        <p:par>
+                          <p:cTn id="4" fill="hold">
+                            <p:stCondLst>
+                              <p:cond delay="0"/>
+                            </p:stCondLst>
+                            <p:childTnLst>
+                              <p:par>
+                                <p:cTn id="5" presetID="1" presetClass="entr" presetSubtype="0" fill="hold" nodeType="clickEffect">
+                                  <p:stCondLst>
+                                    <p:cond delay="0"/>
+                                  </p:stCondLst>
+                                  <p:childTnLst>
+                                    <p:set>
+                                      <p:cBhvr>
+                                        <p:cTn id="6" dur="1" fill="hold">
+                                          <p:stCondLst>
+                                            <p:cond delay="0"/>
+                                          </p:stCondLst>
+                                        </p:cTn>
+                                        <p:tgtEl>
+                                          <p:spTgt spid="30"/>
+                                        </p:tgtEl>
+                                        <p:attrNameLst>
+                                          <p:attrName>style.visibility</p:attrName>
+                                        </p:attrNameLst>
+                                      </p:cBhvr>
+                                      <p:to>
+                                        <p:strVal val="visible"/>
+                                      </p:to>
+                                    </p:set>
+                                  </p:childTnLst>
+                                </p:cTn>
+                              </p:par>
+                            </p:childTnLst>
+                          </p:cTn>
+                        </p:par>
+                      </p:childTnLst>
+                    </p:cTn>
+                  </p:par>
+                  <p:par>
+                    <p:cTn id="7" fill="hold">
+                      <p:stCondLst>
+                        <p:cond delay="indefinite"/>
+                      </p:stCondLst>
+                      <p:childTnLst>
+                        <p:par>
+                          <p:cTn id="8" fill="hold">
+                            <p:stCondLst>
+                              <p:cond delay="0"/>
+                            </p:stCondLst>
+                            <p:childTnLst>
+                              <p:par>
+                                <p:cTn id="9" presetID="1" presetClass="entr" presetSubtype="0" fill="hold" nodeType="clickEffect">
+                                  <p:stCondLst>
+                                    <p:cond delay="0"/>
+                                  </p:stCondLst>
+                                  <p:childTnLst>
+                                    <p:set>
+                                      <p:cBhvr>
+                                        <p:cTn id="10" dur="1" fill="hold">
+                                          <p:stCondLst>
+                                            <p:cond delay="0"/>
+                                          </p:stCondLst>
+                                        </p:cTn>
+                                        <p:tgtEl>
+                                          <p:spTgt spid="32"/>
+                                        </p:tgtEl>
+                                        <p:attrNameLst>
+                                          <p:attrName>style.visibility</p:attrName>
+                                        </p:attrNameLst>
+                                      </p:cBhvr>
+                                      <p:to>
+                                        <p:strVal val="visible"/>
+                                      </p:to>
+                                    </p:set>
+                                  </p:childTnLst>
+                                </p:cTn>
+                              </p:par>
+                            </p:childTnLst>
+                          </p:cTn>
+                        </p:par>
+                      </p:childTnLst>
+                    </p:cTn>
+                  </p:par>
+                  <p:par>
+                    <p:cTn id="11" fill="hold">
+                      <p:stCondLst>
+                        <p:cond delay="indefinite"/>
+                      </p:stCondLst>
+                      <p:childTnLst>
+                        <p:par>
+                          <p:cTn id="12" fill="hold">
+                            <p:stCondLst>
+                              <p:cond delay="0"/>
+                            </p:stCondLst>
+                            <p:childTnLst>
+                              <p:par>
+                                <p:cTn id="13" presetID="1" presetClass="entr" presetSubtype="0" fill="hold" nodeType="clickEffect">
+                                  <p:stCondLst>
+                                    <p:cond delay="0"/>
+                                  </p:stCondLst>
+                                  <p:childTnLst>
+                                    <p:set>
+                                      <p:cBhvr>
+                                        <p:cTn id="14" dur="1" fill="hold">
+                                          <p:stCondLst>
+                                            <p:cond delay="0"/>
+                                          </p:stCondLst>
+                                        </p:cTn>
+                                        <p:tgtEl>
+                                          <p:spTgt spid="33"/>
+                                        </p:tgtEl>
+                                        <p:attrNameLst>
+                                          <p:attrName>style.visibility</p:attrName>
+                                        </p:attrNameLst>
+                                      </p:cBhvr>
+                                      <p:to>
+                                        <p:strVal val="visible"/>
+                                      </p:to>
+                                    </p:set>
+                                  </p:childTnLst>
+                                </p:cTn>
+                              </p:par>
+                              <p:par>
+                                <p:cTn id="15" presetID="1" presetClass="entr" presetSubtype="0" fill="hold" nodeType="withEffect">
+                                  <p:stCondLst>
+                                    <p:cond delay="0"/>
+                                  </p:stCondLst>
+                                  <p:childTnLst>
+                                    <p:set>
+                                      <p:cBhvr>
+                                        <p:cTn id="16" dur="1" fill="hold">
+                                          <p:stCondLst>
+                                            <p:cond delay="0"/>
+                                          </p:stCondLst>
+                                        </p:cTn>
+                                        <p:tgtEl>
+                                          <p:spTgt spid="34"/>
+                                        </p:tgtEl>
+                                        <p:attrNameLst>
+                                          <p:attrName>style.visibility</p:attrName>
+                                        </p:attrNameLst>
+                                      </p:cBhvr>
+                                      <p:to>
+                                        <p:strVal val="visible"/>
+                                      </p:to>
+                                    </p:set>
+                                  </p:childTnLst>
+                                </p:cTn>
+                              </p:par>
+                            </p:childTnLst>
+                          </p:cTn>
+                        </p:par>
+                      </p:childTnLst>
+                    </p:cTn>
+                  </p:par>
+                </p:childTnLst>
+              </p:cTn>
+              <p:prevCondLst>
+                <p:cond evt="onPrev" delay="0">
+                  <p:tgtEl>
+                    <p:sldTgt/>
+                  </p:tgtEl>
+                </p:cond>
+              </p:prevCondLst>
+              <p:nextCondLst>
+                <p:cond evt="onNext" delay="0">
+                  <p:tgtEl>
+                    <p:sldTgt/>
+                  </p:tgtEl>
+                </p:cond>
+              </p:nextCondLst>
+            </p:seq>
+          </p:childTnLst>
+        </p:cTn>
+      </p:par>
+    </p:tnLst>
+  </p:timing>
+</p:sld>
+</file>
+
+<file path=ppt/slides/slide18.xml><?xml version="1.0" encoding="utf-8"?>
+<p:sld xmlns:a="http://schemas.openxmlformats.org/drawingml/2006/main" xmlns:r="http://schemas.openxmlformats.org/officeDocument/2006/relationships" xmlns:p="http://schemas.openxmlformats.org/presentationml/2006/main">
+  <p:cSld>
+    <p:spTree>
+      <p:nvGrpSpPr>
+        <p:cNvPr id="1" name=""/>
+        <p:cNvGrpSpPr/>
+        <p:nvPr/>
+      </p:nvGrpSpPr>
+      <p:grpSpPr>
+        <a:xfrm>
+          <a:off x="0" y="0"/>
+          <a:ext cx="0" cy="0"/>
+          <a:chOff x="0" y="0"/>
+          <a:chExt cx="0" cy="0"/>
+        </a:xfrm>
+      </p:grpSpPr>
+      <p:sp>
+        <p:nvSpPr>
           <p:cNvPr id="7" name="Text Placeholder 6">
             <a:extLst>
               <a:ext uri="{FF2B5EF4-FFF2-40B4-BE49-F238E27FC236}">
@@ -19718,7 +22852,7 @@
 </p:sld>
 </file>
 
-<file path=ppt/slides/slide17.xml><?xml version="1.0" encoding="utf-8"?>
+<file path=ppt/slides/slide19.xml><?xml version="1.0" encoding="utf-8"?>
 <p:sld xmlns:a="http://schemas.openxmlformats.org/drawingml/2006/main" xmlns:r="http://schemas.openxmlformats.org/officeDocument/2006/relationships" xmlns:p="http://schemas.openxmlformats.org/presentationml/2006/main">
   <p:cSld>
     <p:spTree>
@@ -19888,32 +23022,6 @@
   <p:clrMapOvr>
     <a:masterClrMapping/>
   </p:clrMapOvr>
-</p:sld>
-</file>
-
-<file path=ppt/slides/slide18.xml><?xml version="1.0" encoding="utf-8"?>
-<p:sld xmlns:a="http://schemas.openxmlformats.org/drawingml/2006/main" xmlns:r="http://schemas.openxmlformats.org/officeDocument/2006/relationships" xmlns:p="http://schemas.openxmlformats.org/presentationml/2006/main" show="0">
-  <p:cSld>
-    <p:spTree>
-      <p:nvGrpSpPr>
-        <p:cNvPr id="1" name=""/>
-        <p:cNvGrpSpPr/>
-        <p:nvPr/>
-      </p:nvGrpSpPr>
-      <p:grpSpPr>
-        <a:xfrm>
-          <a:off x="0" y="0"/>
-          <a:ext cx="0" cy="0"/>
-          <a:chOff x="0" y="0"/>
-          <a:chExt cx="0" cy="0"/>
-        </a:xfrm>
-      </p:grpSpPr>
-    </p:spTree>
-  </p:cSld>
-  <p:clrMapOvr>
-    <a:masterClrMapping/>
-  </p:clrMapOvr>
-  <p:transition spd="med"/>
 </p:sld>
 </file>
 
@@ -20653,6 +23761,32 @@
   <p:clrMapOvr>
     <a:masterClrMapping/>
   </p:clrMapOvr>
+</p:sld>
+</file>
+
+<file path=ppt/slides/slide20.xml><?xml version="1.0" encoding="utf-8"?>
+<p:sld xmlns:a="http://schemas.openxmlformats.org/drawingml/2006/main" xmlns:r="http://schemas.openxmlformats.org/officeDocument/2006/relationships" xmlns:p="http://schemas.openxmlformats.org/presentationml/2006/main" show="0">
+  <p:cSld>
+    <p:spTree>
+      <p:nvGrpSpPr>
+        <p:cNvPr id="1" name=""/>
+        <p:cNvGrpSpPr/>
+        <p:nvPr/>
+      </p:nvGrpSpPr>
+      <p:grpSpPr>
+        <a:xfrm>
+          <a:off x="0" y="0"/>
+          <a:ext cx="0" cy="0"/>
+          <a:chOff x="0" y="0"/>
+          <a:chExt cx="0" cy="0"/>
+        </a:xfrm>
+      </p:grpSpPr>
+    </p:spTree>
+  </p:cSld>
+  <p:clrMapOvr>
+    <a:masterClrMapping/>
+  </p:clrMapOvr>
+  <p:transition spd="med"/>
 </p:sld>
 </file>
 

--- a/kubernetes/11_1_accessControll_and_resourceConsumption.pptx
+++ b/kubernetes/11_1_accessControll_and_resourceConsumption.pptx
@@ -26596,132 +26596,6 @@
   <p:clrMapOvr>
     <a:masterClrMapping/>
   </p:clrMapOvr>
-  <p:timing>
-    <p:tnLst>
-      <p:par>
-        <p:cTn id="1" dur="indefinite" restart="never" nodeType="tmRoot">
-          <p:childTnLst>
-            <p:seq concurrent="1" nextAc="seek">
-              <p:cTn id="2" dur="indefinite" nodeType="mainSeq">
-                <p:childTnLst>
-                  <p:par>
-                    <p:cTn id="3" fill="hold">
-                      <p:stCondLst>
-                        <p:cond delay="indefinite"/>
-                        <p:cond evt="onBegin" delay="0">
-                          <p:tn val="2"/>
-                        </p:cond>
-                      </p:stCondLst>
-                      <p:childTnLst>
-                        <p:par>
-                          <p:cTn id="4" fill="hold">
-                            <p:stCondLst>
-                              <p:cond delay="0"/>
-                            </p:stCondLst>
-                            <p:childTnLst>
-                              <p:par>
-                                <p:cTn id="5" presetID="1" presetClass="entr" presetSubtype="0" fill="hold" grpId="0" nodeType="withEffect">
-                                  <p:stCondLst>
-                                    <p:cond delay="0"/>
-                                  </p:stCondLst>
-                                  <p:childTnLst>
-                                    <p:set>
-                                      <p:cBhvr>
-                                        <p:cTn id="6" dur="1" fill="hold">
-                                          <p:stCondLst>
-                                            <p:cond delay="0"/>
-                                          </p:stCondLst>
-                                        </p:cTn>
-                                        <p:tgtEl>
-                                          <p:spTgt spid="18"/>
-                                        </p:tgtEl>
-                                        <p:attrNameLst>
-                                          <p:attrName>style.visibility</p:attrName>
-                                        </p:attrNameLst>
-                                      </p:cBhvr>
-                                      <p:to>
-                                        <p:strVal val="visible"/>
-                                      </p:to>
-                                    </p:set>
-                                  </p:childTnLst>
-                                </p:cTn>
-                              </p:par>
-                            </p:childTnLst>
-                          </p:cTn>
-                        </p:par>
-                      </p:childTnLst>
-                    </p:cTn>
-                  </p:par>
-                  <p:par>
-                    <p:cTn id="7" fill="hold">
-                      <p:stCondLst>
-                        <p:cond delay="indefinite"/>
-                      </p:stCondLst>
-                      <p:childTnLst>
-                        <p:par>
-                          <p:cTn id="8" fill="hold">
-                            <p:stCondLst>
-                              <p:cond delay="0"/>
-                            </p:stCondLst>
-                            <p:childTnLst>
-                              <p:par>
-                                <p:cTn id="9" presetID="1" presetClass="entr" presetSubtype="0" fill="hold" nodeType="clickEffect">
-                                  <p:stCondLst>
-                                    <p:cond delay="0"/>
-                                  </p:stCondLst>
-                                  <p:childTnLst>
-                                    <p:set>
-                                      <p:cBhvr>
-                                        <p:cTn id="10" dur="1" fill="hold">
-                                          <p:stCondLst>
-                                            <p:cond delay="0"/>
-                                          </p:stCondLst>
-                                        </p:cTn>
-                                        <p:tgtEl>
-                                          <p:spTgt spid="19"/>
-                                        </p:tgtEl>
-                                        <p:attrNameLst>
-                                          <p:attrName>style.visibility</p:attrName>
-                                        </p:attrNameLst>
-                                      </p:cBhvr>
-                                      <p:to>
-                                        <p:strVal val="visible"/>
-                                      </p:to>
-                                    </p:set>
-                                  </p:childTnLst>
-                                </p:cTn>
-                              </p:par>
-                            </p:childTnLst>
-                          </p:cTn>
-                        </p:par>
-                      </p:childTnLst>
-                    </p:cTn>
-                  </p:par>
-                </p:childTnLst>
-              </p:cTn>
-              <p:prevCondLst>
-                <p:cond evt="onPrev" delay="0">
-                  <p:tgtEl>
-                    <p:sldTgt/>
-                  </p:tgtEl>
-                </p:cond>
-              </p:prevCondLst>
-              <p:nextCondLst>
-                <p:cond evt="onNext" delay="0">
-                  <p:tgtEl>
-                    <p:sldTgt/>
-                  </p:tgtEl>
-                </p:cond>
-              </p:nextCondLst>
-            </p:seq>
-          </p:childTnLst>
-        </p:cTn>
-      </p:par>
-    </p:tnLst>
-    <p:bldLst>
-      <p:bldP spid="18" grpId="0" animBg="1"/>
-    </p:bldLst>
-  </p:timing>
 </p:sld>
 </file>
 
